--- a/ADG/_실측판/10장/10장_ActiveDataGuard_FarSync와Cascading.pptx
+++ b/ADG/_실측판/10장/10장_ActiveDataGuard_FarSync와Cascading.pptx
@@ -5971,7 +5971,17 @@
                 </a:solidFill>
                 <a:latin typeface="맑은 고딕"/>
               </a:rPr>
-              <a:t>•  `ALTER DATABASE CREATE FAR SYNC INSTANCE CONTROLFILE AS '/tmp/farsync.ctl';`</a:t>
+              <a:t>•  </a:t>
+            </a:r>
+            <a:r>
+              <a:rPr sz="1700" b="0">
+                <a:solidFill>
+                  <a:srgbClr val="222222"/>
+                </a:solidFill>
+                <a:latin typeface="Consolas"/>
+                <a:cs typeface="Consolas"/>
+              </a:rPr>
+              <a:t>ALTER DATABASE CREATE FAR SYNC INSTANCE CONTROLFILE AS '/tmp/farsync.ctl';</a:t>
             </a:r>
           </a:p>
           <a:p>
@@ -5987,7 +5997,25 @@
                 </a:solidFill>
                 <a:latin typeface="맑은 고딕"/>
               </a:rPr>
-              <a:t>•  실측 **18,989,056바이트** (약 19MB)</a:t>
+              <a:t>•  실측 </a:t>
+            </a:r>
+            <a:r>
+              <a:rPr sz="1700" b="1">
+                <a:solidFill>
+                  <a:srgbClr val="222222"/>
+                </a:solidFill>
+                <a:latin typeface="맑은 고딕"/>
+              </a:rPr>
+              <a:t>18,989,056바이트</a:t>
+            </a:r>
+            <a:r>
+              <a:rPr sz="1700" b="0">
+                <a:solidFill>
+                  <a:srgbClr val="222222"/>
+                </a:solidFill>
+                <a:latin typeface="맑은 고딕"/>
+              </a:rPr>
+              <a:t> (약 19MB)</a:t>
             </a:r>
           </a:p>
           <a:p>
@@ -6019,7 +6047,34 @@
                 </a:solidFill>
                 <a:latin typeface="맑은 고딕"/>
               </a:rPr>
-              <a:t>•  **FAR SYNC 는 띄어 쓴다.** 붙여 쓰면 **ORA-00900**</a:t>
+              <a:t>•  </a:t>
+            </a:r>
+            <a:r>
+              <a:rPr sz="1700" b="1">
+                <a:solidFill>
+                  <a:srgbClr val="222222"/>
+                </a:solidFill>
+                <a:latin typeface="맑은 고딕"/>
+              </a:rPr>
+              <a:t>FAR SYNC 는 띄어 쓴다.</a:t>
+            </a:r>
+            <a:r>
+              <a:rPr sz="1700" b="0">
+                <a:solidFill>
+                  <a:srgbClr val="222222"/>
+                </a:solidFill>
+                <a:latin typeface="맑은 고딕"/>
+              </a:rPr>
+              <a:t> 붙여 쓰면 </a:t>
+            </a:r>
+            <a:r>
+              <a:rPr sz="1700" b="1">
+                <a:solidFill>
+                  <a:srgbClr val="222222"/>
+                </a:solidFill>
+                <a:latin typeface="맑은 고딕"/>
+              </a:rPr>
+              <a:t>ORA-00900</a:t>
             </a:r>
           </a:p>
         </p:txBody>
@@ -6198,7 +6253,44 @@
                 </a:solidFill>
                 <a:latin typeface="맑은 고딕"/>
               </a:rPr>
-              <a:t>•  **옮긴다** — 컨트롤 파일, 패스워드 파일(`orapwfarsync`)</a:t>
+              <a:t>•  </a:t>
+            </a:r>
+            <a:r>
+              <a:rPr sz="1700" b="1">
+                <a:solidFill>
+                  <a:srgbClr val="222222"/>
+                </a:solidFill>
+                <a:latin typeface="맑은 고딕"/>
+              </a:rPr>
+              <a:t>옮긴다</a:t>
+            </a:r>
+            <a:r>
+              <a:rPr sz="1700" b="0">
+                <a:solidFill>
+                  <a:srgbClr val="222222"/>
+                </a:solidFill>
+                <a:latin typeface="맑은 고딕"/>
+              </a:rPr>
+              <a:t> — 컨트롤 파일, 패스워드 파일(</a:t>
+            </a:r>
+            <a:r>
+              <a:rPr sz="1700" b="0">
+                <a:solidFill>
+                  <a:srgbClr val="222222"/>
+                </a:solidFill>
+                <a:latin typeface="Consolas"/>
+                <a:cs typeface="Consolas"/>
+              </a:rPr>
+              <a:t>orapwfarsync</a:t>
+            </a:r>
+            <a:r>
+              <a:rPr sz="1700" b="0">
+                <a:solidFill>
+                  <a:srgbClr val="222222"/>
+                </a:solidFill>
+                <a:latin typeface="맑은 고딕"/>
+              </a:rPr>
+              <a:t>)</a:t>
             </a:r>
           </a:p>
           <a:p>
@@ -6214,7 +6306,25 @@
                 </a:solidFill>
                 <a:latin typeface="맑은 고딕"/>
               </a:rPr>
-              <a:t>•  **안 옮긴다** — 데이터 파일, 임시 파일, SPFILE, 리두 로그</a:t>
+              <a:t>•  </a:t>
+            </a:r>
+            <a:r>
+              <a:rPr sz="1700" b="1">
+                <a:solidFill>
+                  <a:srgbClr val="222222"/>
+                </a:solidFill>
+                <a:latin typeface="맑은 고딕"/>
+              </a:rPr>
+              <a:t>안 옮긴다</a:t>
+            </a:r>
+            <a:r>
+              <a:rPr sz="1700" b="0">
+                <a:solidFill>
+                  <a:srgbClr val="222222"/>
+                </a:solidFill>
+                <a:latin typeface="맑은 고딕"/>
+              </a:rPr>
+              <a:t> — 데이터 파일, 임시 파일, SPFILE, 리두 로그</a:t>
             </a:r>
           </a:p>
           <a:p>
@@ -6230,7 +6340,26 @@
                 </a:solidFill>
                 <a:latin typeface="맑은 고딕"/>
               </a:rPr>
-              <a:t>•  패스워드 파일은 `orapw&lt;SID&gt;` 규칙에 맞춰 이름이 바뀐다</a:t>
+              <a:t>•  패스워드 파일은 </a:t>
+            </a:r>
+            <a:r>
+              <a:rPr sz="1700" b="0">
+                <a:solidFill>
+                  <a:srgbClr val="222222"/>
+                </a:solidFill>
+                <a:latin typeface="Consolas"/>
+                <a:cs typeface="Consolas"/>
+              </a:rPr>
+              <a:t>orapw&lt;SID&gt;</a:t>
+            </a:r>
+            <a:r>
+              <a:rPr sz="1700" b="0">
+                <a:solidFill>
+                  <a:srgbClr val="222222"/>
+                </a:solidFill>
+                <a:latin typeface="맑은 고딕"/>
+              </a:rPr>
+              <a:t> 규칙에 맞춰 이름이 바뀐다</a:t>
             </a:r>
           </a:p>
         </p:txBody>
@@ -6409,7 +6538,36 @@
                 </a:solidFill>
                 <a:latin typeface="맑은 고딕"/>
               </a:rPr>
-              <a:t>•  `db_name=chicago` / `db_unique_name=farsync`</a:t>
+              <a:t>•  </a:t>
+            </a:r>
+            <a:r>
+              <a:rPr sz="1700" b="0">
+                <a:solidFill>
+                  <a:srgbClr val="222222"/>
+                </a:solidFill>
+                <a:latin typeface="Consolas"/>
+                <a:cs typeface="Consolas"/>
+              </a:rPr>
+              <a:t>db_name=chicago</a:t>
+            </a:r>
+            <a:r>
+              <a:rPr sz="1700" b="0">
+                <a:solidFill>
+                  <a:srgbClr val="222222"/>
+                </a:solidFill>
+                <a:latin typeface="맑은 고딕"/>
+              </a:rPr>
+              <a:t> / </a:t>
+            </a:r>
+            <a:r>
+              <a:rPr sz="1700" b="0">
+                <a:solidFill>
+                  <a:srgbClr val="222222"/>
+                </a:solidFill>
+                <a:latin typeface="Consolas"/>
+                <a:cs typeface="Consolas"/>
+              </a:rPr>
+              <a:t>db_unique_name=farsync</a:t>
             </a:r>
           </a:p>
           <a:p>
@@ -6425,7 +6583,35 @@
                 </a:solidFill>
                 <a:latin typeface="맑은 고딕"/>
               </a:rPr>
-              <a:t>•  `log_archive_config='dg_config=(chicago,boston,farsync)'` — **세 노드 모두**</a:t>
+              <a:t>•  </a:t>
+            </a:r>
+            <a:r>
+              <a:rPr sz="1700" b="0">
+                <a:solidFill>
+                  <a:srgbClr val="222222"/>
+                </a:solidFill>
+                <a:latin typeface="Consolas"/>
+                <a:cs typeface="Consolas"/>
+              </a:rPr>
+              <a:t>log_archive_config='dg_config=(chicago,boston,farsync)'</a:t>
+            </a:r>
+            <a:r>
+              <a:rPr sz="1700" b="0">
+                <a:solidFill>
+                  <a:srgbClr val="222222"/>
+                </a:solidFill>
+                <a:latin typeface="맑은 고딕"/>
+              </a:rPr>
+              <a:t> — </a:t>
+            </a:r>
+            <a:r>
+              <a:rPr sz="1700" b="1">
+                <a:solidFill>
+                  <a:srgbClr val="222222"/>
+                </a:solidFill>
+                <a:latin typeface="맑은 고딕"/>
+              </a:rPr>
+              <a:t>세 노드 모두</a:t>
             </a:r>
           </a:p>
           <a:p>
@@ -6441,7 +6627,26 @@
                 </a:solidFill>
                 <a:latin typeface="맑은 고딕"/>
               </a:rPr>
-              <a:t>•  `log_archive_dest_1` — 로컬 아카이브</a:t>
+              <a:t>•  </a:t>
+            </a:r>
+            <a:r>
+              <a:rPr sz="1700" b="0">
+                <a:solidFill>
+                  <a:srgbClr val="222222"/>
+                </a:solidFill>
+                <a:latin typeface="Consolas"/>
+                <a:cs typeface="Consolas"/>
+              </a:rPr>
+              <a:t>log_archive_dest_1</a:t>
+            </a:r>
+            <a:r>
+              <a:rPr sz="1700" b="0">
+                <a:solidFill>
+                  <a:srgbClr val="222222"/>
+                </a:solidFill>
+                <a:latin typeface="맑은 고딕"/>
+              </a:rPr>
+              <a:t> — 로컬 아카이브</a:t>
             </a:r>
           </a:p>
           <a:p>
@@ -6457,7 +6662,26 @@
                 </a:solidFill>
                 <a:latin typeface="맑은 고딕"/>
               </a:rPr>
-              <a:t>•  `log_archive_dest_2='service=boston async ...'` — 다음 목적지로 전달</a:t>
+              <a:t>•  </a:t>
+            </a:r>
+            <a:r>
+              <a:rPr sz="1700" b="0">
+                <a:solidFill>
+                  <a:srgbClr val="222222"/>
+                </a:solidFill>
+                <a:latin typeface="Consolas"/>
+                <a:cs typeface="Consolas"/>
+              </a:rPr>
+              <a:t>log_archive_dest_2='service=boston async ...'</a:t>
+            </a:r>
+            <a:r>
+              <a:rPr sz="1700" b="0">
+                <a:solidFill>
+                  <a:srgbClr val="222222"/>
+                </a:solidFill>
+                <a:latin typeface="맑은 고딕"/>
+              </a:rPr>
+              <a:t> — 다음 목적지로 전달</a:t>
             </a:r>
           </a:p>
           <a:p>
@@ -6473,7 +6697,26 @@
                 </a:solidFill>
                 <a:latin typeface="맑은 고딕"/>
               </a:rPr>
-              <a:t>•  `log_file_name_convert` — SRL 경로 변환</a:t>
+              <a:t>•  </a:t>
+            </a:r>
+            <a:r>
+              <a:rPr sz="1700" b="0">
+                <a:solidFill>
+                  <a:srgbClr val="222222"/>
+                </a:solidFill>
+                <a:latin typeface="Consolas"/>
+                <a:cs typeface="Consolas"/>
+              </a:rPr>
+              <a:t>log_file_name_convert</a:t>
+            </a:r>
+            <a:r>
+              <a:rPr sz="1700" b="0">
+                <a:solidFill>
+                  <a:srgbClr val="222222"/>
+                </a:solidFill>
+                <a:latin typeface="맑은 고딕"/>
+              </a:rPr>
+              <a:t> — SRL 경로 변환</a:t>
             </a:r>
           </a:p>
           <a:p>
@@ -6489,7 +6732,44 @@
                 </a:solidFill>
                 <a:latin typeface="맑은 고딕"/>
               </a:rPr>
-              <a:t>•  **없는 것** — `db_create_file_dest`. 만들 데이터 파일이 없다</a:t>
+              <a:t>•  </a:t>
+            </a:r>
+            <a:r>
+              <a:rPr sz="1700" b="1">
+                <a:solidFill>
+                  <a:srgbClr val="222222"/>
+                </a:solidFill>
+                <a:latin typeface="맑은 고딕"/>
+              </a:rPr>
+              <a:t>없는 것</a:t>
+            </a:r>
+            <a:r>
+              <a:rPr sz="1700" b="0">
+                <a:solidFill>
+                  <a:srgbClr val="222222"/>
+                </a:solidFill>
+                <a:latin typeface="맑은 고딕"/>
+              </a:rPr>
+              <a:t> — </a:t>
+            </a:r>
+            <a:r>
+              <a:rPr sz="1700" b="0">
+                <a:solidFill>
+                  <a:srgbClr val="222222"/>
+                </a:solidFill>
+                <a:latin typeface="Consolas"/>
+                <a:cs typeface="Consolas"/>
+              </a:rPr>
+              <a:t>db_create_file_dest</a:t>
+            </a:r>
+            <a:r>
+              <a:rPr sz="1700" b="0">
+                <a:solidFill>
+                  <a:srgbClr val="222222"/>
+                </a:solidFill>
+                <a:latin typeface="맑은 고딕"/>
+              </a:rPr>
+              <a:t>. 만들 데이터 파일이 없다</a:t>
             </a:r>
           </a:p>
         </p:txBody>
@@ -6668,7 +6948,26 @@
                 </a:solidFill>
                 <a:latin typeface="맑은 고딕"/>
               </a:rPr>
-              <a:t>•  `STARTUP MOUNT pfile=...` 한 번으로 끝난다</a:t>
+              <a:t>•  </a:t>
+            </a:r>
+            <a:r>
+              <a:rPr sz="1700" b="0">
+                <a:solidFill>
+                  <a:srgbClr val="222222"/>
+                </a:solidFill>
+                <a:latin typeface="Consolas"/>
+                <a:cs typeface="Consolas"/>
+              </a:rPr>
+              <a:t>STARTUP MOUNT pfile=...</a:t>
+            </a:r>
+            <a:r>
+              <a:rPr sz="1700" b="0">
+                <a:solidFill>
+                  <a:srgbClr val="222222"/>
+                </a:solidFill>
+                <a:latin typeface="맑은 고딕"/>
+              </a:rPr>
+              <a:t> 한 번으로 끝난다</a:t>
             </a:r>
           </a:p>
           <a:p>
@@ -6684,7 +6983,35 @@
                 </a:solidFill>
                 <a:latin typeface="맑은 고딕"/>
               </a:rPr>
-              <a:t>•  `DATABASE_ROLE` = **FAR SYNC**</a:t>
+              <a:t>•  </a:t>
+            </a:r>
+            <a:r>
+              <a:rPr sz="1700" b="0">
+                <a:solidFill>
+                  <a:srgbClr val="222222"/>
+                </a:solidFill>
+                <a:latin typeface="Consolas"/>
+                <a:cs typeface="Consolas"/>
+              </a:rPr>
+              <a:t>DATABASE_ROLE</a:t>
+            </a:r>
+            <a:r>
+              <a:rPr sz="1700" b="0">
+                <a:solidFill>
+                  <a:srgbClr val="222222"/>
+                </a:solidFill>
+                <a:latin typeface="맑은 고딕"/>
+              </a:rPr>
+              <a:t> = </a:t>
+            </a:r>
+            <a:r>
+              <a:rPr sz="1700" b="1">
+                <a:solidFill>
+                  <a:srgbClr val="222222"/>
+                </a:solidFill>
+                <a:latin typeface="맑은 고딕"/>
+              </a:rPr>
+              <a:t>FAR SYNC</a:t>
             </a:r>
           </a:p>
           <a:p>
@@ -6700,7 +7027,35 @@
                 </a:solidFill>
                 <a:latin typeface="맑은 고딕"/>
               </a:rPr>
-              <a:t>•  `CONTROLFILE_TYPE` = **FARSYNC**</a:t>
+              <a:t>•  </a:t>
+            </a:r>
+            <a:r>
+              <a:rPr sz="1700" b="0">
+                <a:solidFill>
+                  <a:srgbClr val="222222"/>
+                </a:solidFill>
+                <a:latin typeface="Consolas"/>
+                <a:cs typeface="Consolas"/>
+              </a:rPr>
+              <a:t>CONTROLFILE_TYPE</a:t>
+            </a:r>
+            <a:r>
+              <a:rPr sz="1700" b="0">
+                <a:solidFill>
+                  <a:srgbClr val="222222"/>
+                </a:solidFill>
+                <a:latin typeface="맑은 고딕"/>
+              </a:rPr>
+              <a:t> = </a:t>
+            </a:r>
+            <a:r>
+              <a:rPr sz="1700" b="1">
+                <a:solidFill>
+                  <a:srgbClr val="222222"/>
+                </a:solidFill>
+                <a:latin typeface="맑은 고딕"/>
+              </a:rPr>
+              <a:t>FARSYNC</a:t>
             </a:r>
           </a:p>
           <a:p>
@@ -6716,7 +7071,44 @@
                 </a:solidFill>
                 <a:latin typeface="맑은 고딕"/>
               </a:rPr>
-              <a:t>•  `OPEN_MODE` = **MOUNTED** (열 수 없다)</a:t>
+              <a:t>•  </a:t>
+            </a:r>
+            <a:r>
+              <a:rPr sz="1700" b="0">
+                <a:solidFill>
+                  <a:srgbClr val="222222"/>
+                </a:solidFill>
+                <a:latin typeface="Consolas"/>
+                <a:cs typeface="Consolas"/>
+              </a:rPr>
+              <a:t>OPEN_MODE</a:t>
+            </a:r>
+            <a:r>
+              <a:rPr sz="1700" b="0">
+                <a:solidFill>
+                  <a:srgbClr val="222222"/>
+                </a:solidFill>
+                <a:latin typeface="맑은 고딕"/>
+              </a:rPr>
+              <a:t> = </a:t>
+            </a:r>
+            <a:r>
+              <a:rPr sz="1700" b="1">
+                <a:solidFill>
+                  <a:srgbClr val="222222"/>
+                </a:solidFill>
+                <a:latin typeface="맑은 고딕"/>
+              </a:rPr>
+              <a:t>MOUNTED</a:t>
+            </a:r>
+            <a:r>
+              <a:rPr sz="1700" b="0">
+                <a:solidFill>
+                  <a:srgbClr val="222222"/>
+                </a:solidFill>
+                <a:latin typeface="맑은 고딕"/>
+              </a:rPr>
+              <a:t> (열 수 없다)</a:t>
             </a:r>
           </a:p>
           <a:p>
@@ -6732,7 +7124,35 @@
                 </a:solidFill>
                 <a:latin typeface="맑은 고딕"/>
               </a:rPr>
-              <a:t>•  열려고 하면 **ORA-16476** — `far sync instance does not allow Open operation`</a:t>
+              <a:t>•  열려고 하면 </a:t>
+            </a:r>
+            <a:r>
+              <a:rPr sz="1700" b="1">
+                <a:solidFill>
+                  <a:srgbClr val="222222"/>
+                </a:solidFill>
+                <a:latin typeface="맑은 고딕"/>
+              </a:rPr>
+              <a:t>ORA-16476</a:t>
+            </a:r>
+            <a:r>
+              <a:rPr sz="1700" b="0">
+                <a:solidFill>
+                  <a:srgbClr val="222222"/>
+                </a:solidFill>
+                <a:latin typeface="맑은 고딕"/>
+              </a:rPr>
+              <a:t> — </a:t>
+            </a:r>
+            <a:r>
+              <a:rPr sz="1700" b="0">
+                <a:solidFill>
+                  <a:srgbClr val="222222"/>
+                </a:solidFill>
+                <a:latin typeface="Consolas"/>
+                <a:cs typeface="Consolas"/>
+              </a:rPr>
+              <a:t>far sync instance does not allow Open operation</a:t>
             </a:r>
           </a:p>
         </p:txBody>
@@ -6911,7 +7331,35 @@
                 </a:solidFill>
                 <a:latin typeface="맑은 고딕"/>
               </a:rPr>
-              <a:t>•  `ADD STANDBY LOGFILE GROUP 4` → **ORA-01184: logfile group 4 already exists**</a:t>
+              <a:t>•  </a:t>
+            </a:r>
+            <a:r>
+              <a:rPr sz="1700" b="0">
+                <a:solidFill>
+                  <a:srgbClr val="222222"/>
+                </a:solidFill>
+                <a:latin typeface="Consolas"/>
+                <a:cs typeface="Consolas"/>
+              </a:rPr>
+              <a:t>ADD STANDBY LOGFILE GROUP 4</a:t>
+            </a:r>
+            <a:r>
+              <a:rPr sz="1700" b="0">
+                <a:solidFill>
+                  <a:srgbClr val="222222"/>
+                </a:solidFill>
+                <a:latin typeface="맑은 고딕"/>
+              </a:rPr>
+              <a:t> → </a:t>
+            </a:r>
+            <a:r>
+              <a:rPr sz="1700" b="1">
+                <a:solidFill>
+                  <a:srgbClr val="222222"/>
+                </a:solidFill>
+                <a:latin typeface="맑은 고딕"/>
+              </a:rPr>
+              <a:t>ORA-01184: logfile group 4 already exists</a:t>
             </a:r>
           </a:p>
           <a:p>
@@ -6927,7 +7375,26 @@
                 </a:solidFill>
                 <a:latin typeface="맑은 고딕"/>
               </a:rPr>
-              <a:t>•  `V$LOGFILE` 에 STANDBY 4~7 이 이미 있다 (경로는 변환됨)</a:t>
+              <a:t>•  </a:t>
+            </a:r>
+            <a:r>
+              <a:rPr sz="1700" b="0">
+                <a:solidFill>
+                  <a:srgbClr val="222222"/>
+                </a:solidFill>
+                <a:latin typeface="Consolas"/>
+                <a:cs typeface="Consolas"/>
+              </a:rPr>
+              <a:t>V$LOGFILE</a:t>
+            </a:r>
+            <a:r>
+              <a:rPr sz="1700" b="0">
+                <a:solidFill>
+                  <a:srgbClr val="222222"/>
+                </a:solidFill>
+                <a:latin typeface="맑은 고딕"/>
+              </a:rPr>
+              <a:t> 에 STANDBY 4~7 이 이미 있다 (경로는 변환됨)</a:t>
             </a:r>
           </a:p>
           <a:p>
@@ -6943,7 +7410,45 @@
                 </a:solidFill>
                 <a:latin typeface="맑은 고딕"/>
               </a:rPr>
-              <a:t>•  그런데 `ls` 하면 `control01.ctl` 하나뿐</a:t>
+              <a:t>•  그런데 </a:t>
+            </a:r>
+            <a:r>
+              <a:rPr sz="1700" b="0">
+                <a:solidFill>
+                  <a:srgbClr val="222222"/>
+                </a:solidFill>
+                <a:latin typeface="Consolas"/>
+                <a:cs typeface="Consolas"/>
+              </a:rPr>
+              <a:t>ls</a:t>
+            </a:r>
+            <a:r>
+              <a:rPr sz="1700" b="0">
+                <a:solidFill>
+                  <a:srgbClr val="222222"/>
+                </a:solidFill>
+                <a:latin typeface="맑은 고딕"/>
+              </a:rPr>
+              <a:t> 하면 </a:t>
+            </a:r>
+            <a:r>
+              <a:rPr sz="1700" b="0">
+                <a:solidFill>
+                  <a:srgbClr val="222222"/>
+                </a:solidFill>
+                <a:latin typeface="Consolas"/>
+                <a:cs typeface="Consolas"/>
+              </a:rPr>
+              <a:t>control01.ctl</a:t>
+            </a:r>
+            <a:r>
+              <a:rPr sz="1700" b="0">
+                <a:solidFill>
+                  <a:srgbClr val="222222"/>
+                </a:solidFill>
+                <a:latin typeface="맑은 고딕"/>
+              </a:rPr>
+              <a:t> 하나뿐</a:t>
             </a:r>
           </a:p>
           <a:p>
@@ -6959,7 +7464,17 @@
                 </a:solidFill>
                 <a:latin typeface="맑은 고딕"/>
               </a:rPr>
-              <a:t>•  해결 — `ALTER DATABASE CLEAR LOGFILE GROUP 4~7`</a:t>
+              <a:t>•  해결 — </a:t>
+            </a:r>
+            <a:r>
+              <a:rPr sz="1700" b="0">
+                <a:solidFill>
+                  <a:srgbClr val="222222"/>
+                </a:solidFill>
+                <a:latin typeface="Consolas"/>
+                <a:cs typeface="Consolas"/>
+              </a:rPr>
+              <a:t>ALTER DATABASE CLEAR LOGFILE GROUP 4~7</a:t>
             </a:r>
           </a:p>
           <a:p>
@@ -6975,7 +7490,25 @@
                 </a:solidFill>
                 <a:latin typeface="맑은 고딕"/>
               </a:rPr>
-              <a:t>•  각 **209,715,712바이트** (200MB) 생성</a:t>
+              <a:t>•  각 </a:t>
+            </a:r>
+            <a:r>
+              <a:rPr sz="1700" b="1">
+                <a:solidFill>
+                  <a:srgbClr val="222222"/>
+                </a:solidFill>
+                <a:latin typeface="맑은 고딕"/>
+              </a:rPr>
+              <a:t>209,715,712바이트</a:t>
+            </a:r>
+            <a:r>
+              <a:rPr sz="1700" b="0">
+                <a:solidFill>
+                  <a:srgbClr val="222222"/>
+                </a:solidFill>
+                <a:latin typeface="맑은 고딕"/>
+              </a:rPr>
+              <a:t> (200MB) 생성</a:t>
             </a:r>
           </a:p>
         </p:txBody>
@@ -7154,7 +7687,17 @@
                 </a:solidFill>
                 <a:latin typeface="맑은 고딕"/>
               </a:rPr>
-              <a:t>•  정적 등록 — `status UNKNOWN`</a:t>
+              <a:t>•  정적 등록 — </a:t>
+            </a:r>
+            <a:r>
+              <a:rPr sz="1700" b="0">
+                <a:solidFill>
+                  <a:srgbClr val="222222"/>
+                </a:solidFill>
+                <a:latin typeface="Consolas"/>
+                <a:cs typeface="Consolas"/>
+              </a:rPr>
+              <a:t>status UNKNOWN</a:t>
             </a:r>
           </a:p>
           <a:p>
@@ -7170,7 +7713,26 @@
                 </a:solidFill>
                 <a:latin typeface="맑은 고딕"/>
               </a:rPr>
-              <a:t>•  잠시 뒤 다시 보면 **`status READY` 가 함께 나타난다**</a:t>
+              <a:t>•  잠시 뒤 다시 보면 </a:t>
+            </a:r>
+            <a:r>
+              <a:rPr sz="1700" b="1">
+                <a:solidFill>
+                  <a:srgbClr val="222222"/>
+                </a:solidFill>
+                <a:latin typeface="Consolas"/>
+                <a:cs typeface="Consolas"/>
+              </a:rPr>
+              <a:t>status READY</a:t>
+            </a:r>
+            <a:r>
+              <a:rPr sz="1700" b="1">
+                <a:solidFill>
+                  <a:srgbClr val="222222"/>
+                </a:solidFill>
+                <a:latin typeface="맑은 고딕"/>
+              </a:rPr>
+              <a:t> 가 함께 나타난다</a:t>
             </a:r>
           </a:p>
           <a:p>
@@ -7202,7 +7764,26 @@
                 </a:solidFill>
                 <a:latin typeface="맑은 고딕"/>
               </a:rPr>
-              <a:t>•  딕셔너리가 없어도 등록된다 — PMON 은 `SERVICE_NAMES` 를 알린다</a:t>
+              <a:t>•  딕셔너리가 없어도 등록된다 — PMON 은 </a:t>
+            </a:r>
+            <a:r>
+              <a:rPr sz="1700" b="0">
+                <a:solidFill>
+                  <a:srgbClr val="222222"/>
+                </a:solidFill>
+                <a:latin typeface="Consolas"/>
+                <a:cs typeface="Consolas"/>
+              </a:rPr>
+              <a:t>SERVICE_NAMES</a:t>
+            </a:r>
+            <a:r>
+              <a:rPr sz="1700" b="0">
+                <a:solidFill>
+                  <a:srgbClr val="222222"/>
+                </a:solidFill>
+                <a:latin typeface="맑은 고딕"/>
+              </a:rPr>
+              <a:t> 를 알린다</a:t>
             </a:r>
           </a:p>
           <a:p>
@@ -7218,7 +7799,16 @@
                 </a:solidFill>
                 <a:latin typeface="맑은 고딕"/>
               </a:rPr>
-              <a:t>•  그래도 정적 등록을 하는 이유 — **재기동 중·원격 기동**</a:t>
+              <a:t>•  그래도 정적 등록을 하는 이유 — </a:t>
+            </a:r>
+            <a:r>
+              <a:rPr sz="1700" b="1">
+                <a:solidFill>
+                  <a:srgbClr val="222222"/>
+                </a:solidFill>
+                <a:latin typeface="맑은 고딕"/>
+              </a:rPr>
+              <a:t>재기동 중·원격 기동</a:t>
             </a:r>
           </a:p>
         </p:txBody>
@@ -7652,7 +8242,36 @@
                 </a:solidFill>
                 <a:latin typeface="맑은 고딕"/>
               </a:rPr>
-              <a:t>•  대상 — `boston` → **`farsync`**</a:t>
+              <a:t>•  대상 — </a:t>
+            </a:r>
+            <a:r>
+              <a:rPr sz="1700" b="0">
+                <a:solidFill>
+                  <a:srgbClr val="222222"/>
+                </a:solidFill>
+                <a:latin typeface="Consolas"/>
+                <a:cs typeface="Consolas"/>
+              </a:rPr>
+              <a:t>boston</a:t>
+            </a:r>
+            <a:r>
+              <a:rPr sz="1700" b="0">
+                <a:solidFill>
+                  <a:srgbClr val="222222"/>
+                </a:solidFill>
+                <a:latin typeface="맑은 고딕"/>
+              </a:rPr>
+              <a:t> → </a:t>
+            </a:r>
+            <a:r>
+              <a:rPr sz="1700" b="1">
+                <a:solidFill>
+                  <a:srgbClr val="222222"/>
+                </a:solidFill>
+                <a:latin typeface="Consolas"/>
+                <a:cs typeface="Consolas"/>
+              </a:rPr>
+              <a:t>farsync</a:t>
             </a:r>
           </a:p>
           <a:p>
@@ -7668,7 +8287,36 @@
                 </a:solidFill>
                 <a:latin typeface="맑은 고딕"/>
               </a:rPr>
-              <a:t>•  방식 — `async` → **`sync affirm`**</a:t>
+              <a:t>•  방식 — </a:t>
+            </a:r>
+            <a:r>
+              <a:rPr sz="1700" b="0">
+                <a:solidFill>
+                  <a:srgbClr val="222222"/>
+                </a:solidFill>
+                <a:latin typeface="Consolas"/>
+                <a:cs typeface="Consolas"/>
+              </a:rPr>
+              <a:t>async</a:t>
+            </a:r>
+            <a:r>
+              <a:rPr sz="1700" b="0">
+                <a:solidFill>
+                  <a:srgbClr val="222222"/>
+                </a:solidFill>
+                <a:latin typeface="맑은 고딕"/>
+              </a:rPr>
+              <a:t> → </a:t>
+            </a:r>
+            <a:r>
+              <a:rPr sz="1700" b="1">
+                <a:solidFill>
+                  <a:srgbClr val="222222"/>
+                </a:solidFill>
+                <a:latin typeface="Consolas"/>
+                <a:cs typeface="Consolas"/>
+              </a:rPr>
+              <a:t>sync affirm</a:t>
             </a:r>
           </a:p>
           <a:p>
@@ -7684,7 +8332,26 @@
                 </a:solidFill>
                 <a:latin typeface="맑은 고딕"/>
               </a:rPr>
-              <a:t>•  `log_archive_config` 에 세 이름을 모두 넣는다</a:t>
+              <a:t>•  </a:t>
+            </a:r>
+            <a:r>
+              <a:rPr sz="1700" b="0">
+                <a:solidFill>
+                  <a:srgbClr val="222222"/>
+                </a:solidFill>
+                <a:latin typeface="Consolas"/>
+                <a:cs typeface="Consolas"/>
+              </a:rPr>
+              <a:t>log_archive_config</a:t>
+            </a:r>
+            <a:r>
+              <a:rPr sz="1700" b="0">
+                <a:solidFill>
+                  <a:srgbClr val="222222"/>
+                </a:solidFill>
+                <a:latin typeface="맑은 고딕"/>
+              </a:rPr>
+              <a:t> 에 세 이름을 모두 넣는다</a:t>
             </a:r>
           </a:p>
           <a:p>
@@ -7879,7 +8546,17 @@
                 </a:solidFill>
                 <a:latin typeface="맑은 고딕"/>
               </a:rPr>
-              <a:t>•  farsync 의 2번 목적지 — `ERROR / ORA-16057: server not in Data Guard configuration`</a:t>
+              <a:t>•  farsync 의 2번 목적지 — </a:t>
+            </a:r>
+            <a:r>
+              <a:rPr sz="1700" b="0">
+                <a:solidFill>
+                  <a:srgbClr val="222222"/>
+                </a:solidFill>
+                <a:latin typeface="Consolas"/>
+                <a:cs typeface="Consolas"/>
+              </a:rPr>
+              <a:t>ERROR / ORA-16057: server not in Data Guard configuration</a:t>
             </a:r>
           </a:p>
           <a:p>
@@ -7911,7 +8588,16 @@
                 </a:solidFill>
                 <a:latin typeface="맑은 고딕"/>
               </a:rPr>
-              <a:t>•  메시지의 "server" 는 **보내는 쪽인 자기 자신**</a:t>
+              <a:t>•  메시지의 "server" 는 </a:t>
+            </a:r>
+            <a:r>
+              <a:rPr sz="1700" b="1">
+                <a:solidFill>
+                  <a:srgbClr val="222222"/>
+                </a:solidFill>
+                <a:latin typeface="맑은 고딕"/>
+              </a:rPr>
+              <a:t>보내는 쪽인 자기 자신</a:t>
             </a:r>
           </a:p>
           <a:p>
@@ -7927,7 +8613,35 @@
                 </a:solidFill>
                 <a:latin typeface="맑은 고딕"/>
               </a:rPr>
-              <a:t>•  고쳐야 할 곳은 **boston** 의 `LOG_ARCHIVE_CONFIG`</a:t>
+              <a:t>•  고쳐야 할 곳은 </a:t>
+            </a:r>
+            <a:r>
+              <a:rPr sz="1700" b="1">
+                <a:solidFill>
+                  <a:srgbClr val="222222"/>
+                </a:solidFill>
+                <a:latin typeface="맑은 고딕"/>
+              </a:rPr>
+              <a:t>boston</a:t>
+            </a:r>
+            <a:r>
+              <a:rPr sz="1700" b="0">
+                <a:solidFill>
+                  <a:srgbClr val="222222"/>
+                </a:solidFill>
+                <a:latin typeface="맑은 고딕"/>
+              </a:rPr>
+              <a:t> 의 </a:t>
+            </a:r>
+            <a:r>
+              <a:rPr sz="1700" b="0">
+                <a:solidFill>
+                  <a:srgbClr val="222222"/>
+                </a:solidFill>
+                <a:latin typeface="Consolas"/>
+                <a:cs typeface="Consolas"/>
+              </a:rPr>
+              <a:t>LOG_ARCHIVE_CONFIG</a:t>
             </a:r>
           </a:p>
           <a:p>
@@ -7943,7 +8657,25 @@
                 </a:solidFill>
                 <a:latin typeface="맑은 고딕"/>
               </a:rPr>
-              <a:t>•  실습에서는 설정과 첫 접속 시도가 겹친 **시점의 문제**였다</a:t>
+              <a:t>•  실습에서는 설정과 첫 접속 시도가 겹친 </a:t>
+            </a:r>
+            <a:r>
+              <a:rPr sz="1700" b="1">
+                <a:solidFill>
+                  <a:srgbClr val="222222"/>
+                </a:solidFill>
+                <a:latin typeface="맑은 고딕"/>
+              </a:rPr>
+              <a:t>시점의 문제</a:t>
+            </a:r>
+            <a:r>
+              <a:rPr sz="1700" b="0">
+                <a:solidFill>
+                  <a:srgbClr val="222222"/>
+                </a:solidFill>
+                <a:latin typeface="맑은 고딕"/>
+              </a:rPr>
+              <a:t>였다</a:t>
             </a:r>
           </a:p>
         </p:txBody>
@@ -8122,7 +8854,44 @@
                 </a:solidFill>
                 <a:latin typeface="맑은 고딕"/>
               </a:rPr>
-              <a:t>•  **① 받는 쪽을 먼저 연다** — 모든 노드의 `LOG_ARCHIVE_CONFIG` 확장</a:t>
+              <a:t>•  </a:t>
+            </a:r>
+            <a:r>
+              <a:rPr sz="1700" b="1">
+                <a:solidFill>
+                  <a:srgbClr val="222222"/>
+                </a:solidFill>
+                <a:latin typeface="맑은 고딕"/>
+              </a:rPr>
+              <a:t>① 받는 쪽을 먼저 연다</a:t>
+            </a:r>
+            <a:r>
+              <a:rPr sz="1700" b="0">
+                <a:solidFill>
+                  <a:srgbClr val="222222"/>
+                </a:solidFill>
+                <a:latin typeface="맑은 고딕"/>
+              </a:rPr>
+              <a:t> — 모든 노드의 </a:t>
+            </a:r>
+            <a:r>
+              <a:rPr sz="1700" b="0">
+                <a:solidFill>
+                  <a:srgbClr val="222222"/>
+                </a:solidFill>
+                <a:latin typeface="Consolas"/>
+                <a:cs typeface="Consolas"/>
+              </a:rPr>
+              <a:t>LOG_ARCHIVE_CONFIG</a:t>
+            </a:r>
+            <a:r>
+              <a:rPr sz="1700" b="0">
+                <a:solidFill>
+                  <a:srgbClr val="222222"/>
+                </a:solidFill>
+                <a:latin typeface="맑은 고딕"/>
+              </a:rPr>
+              <a:t> 확장</a:t>
             </a:r>
           </a:p>
           <a:p>
@@ -8138,7 +8907,35 @@
                 </a:solidFill>
                 <a:latin typeface="맑은 고딕"/>
               </a:rPr>
-              <a:t>•  **② 그 다음 보내는 쪽을 바꾼다** — Primary 의 `LOG_ARCHIVE_DEST_n`</a:t>
+              <a:t>•  </a:t>
+            </a:r>
+            <a:r>
+              <a:rPr sz="1700" b="1">
+                <a:solidFill>
+                  <a:srgbClr val="222222"/>
+                </a:solidFill>
+                <a:latin typeface="맑은 고딕"/>
+              </a:rPr>
+              <a:t>② 그 다음 보내는 쪽을 바꾼다</a:t>
+            </a:r>
+            <a:r>
+              <a:rPr sz="1700" b="0">
+                <a:solidFill>
+                  <a:srgbClr val="222222"/>
+                </a:solidFill>
+                <a:latin typeface="맑은 고딕"/>
+              </a:rPr>
+              <a:t> — Primary 의 </a:t>
+            </a:r>
+            <a:r>
+              <a:rPr sz="1700" b="0">
+                <a:solidFill>
+                  <a:srgbClr val="222222"/>
+                </a:solidFill>
+                <a:latin typeface="Consolas"/>
+                <a:cs typeface="Consolas"/>
+              </a:rPr>
+              <a:t>LOG_ARCHIVE_DEST_n</a:t>
             </a:r>
           </a:p>
           <a:p>
@@ -8170,7 +8967,35 @@
                 </a:solidFill>
                 <a:latin typeface="맑은 고딕"/>
               </a:rPr>
-              <a:t>•  오류가 남으면 — `LOG_ARCHIVE_DEST_STATE_n` **DEFER → ENABLE**</a:t>
+              <a:t>•  오류가 남으면 — </a:t>
+            </a:r>
+            <a:r>
+              <a:rPr sz="1700" b="0">
+                <a:solidFill>
+                  <a:srgbClr val="222222"/>
+                </a:solidFill>
+                <a:latin typeface="Consolas"/>
+                <a:cs typeface="Consolas"/>
+              </a:rPr>
+              <a:t>LOG_ARCHIVE_DEST_STATE_n</a:t>
+            </a:r>
+            <a:r>
+              <a:rPr sz="1700" b="0">
+                <a:solidFill>
+                  <a:srgbClr val="222222"/>
+                </a:solidFill>
+                <a:latin typeface="맑은 고딕"/>
+              </a:rPr>
+              <a:t> </a:t>
+            </a:r>
+            <a:r>
+              <a:rPr sz="1700" b="1">
+                <a:solidFill>
+                  <a:srgbClr val="222222"/>
+                </a:solidFill>
+                <a:latin typeface="맑은 고딕"/>
+              </a:rPr>
+              <a:t>DEFER → ENABLE</a:t>
             </a:r>
           </a:p>
         </p:txBody>
@@ -8569,7 +9394,54 @@
                 </a:solidFill>
                 <a:latin typeface="맑은 고딕"/>
               </a:rPr>
-              <a:t>•  `V$ARCHIVE_DEST_STATUS` 에서 `TRANSMIT_MODE` 조회 → **ORA-00904**</a:t>
+              <a:t>•  </a:t>
+            </a:r>
+            <a:r>
+              <a:rPr sz="1700" b="0">
+                <a:solidFill>
+                  <a:srgbClr val="222222"/>
+                </a:solidFill>
+                <a:latin typeface="Consolas"/>
+                <a:cs typeface="Consolas"/>
+              </a:rPr>
+              <a:t>V$ARCHIVE_DEST_STATUS</a:t>
+            </a:r>
+            <a:r>
+              <a:rPr sz="1700" b="0">
+                <a:solidFill>
+                  <a:srgbClr val="222222"/>
+                </a:solidFill>
+                <a:latin typeface="맑은 고딕"/>
+              </a:rPr>
+              <a:t> 에서 </a:t>
+            </a:r>
+            <a:r>
+              <a:rPr sz="1700" b="0">
+                <a:solidFill>
+                  <a:srgbClr val="222222"/>
+                </a:solidFill>
+                <a:latin typeface="Consolas"/>
+                <a:cs typeface="Consolas"/>
+              </a:rPr>
+              <a:t>TRANSMIT_MODE</a:t>
+            </a:r>
+            <a:r>
+              <a:rPr sz="1700" b="0">
+                <a:solidFill>
+                  <a:srgbClr val="222222"/>
+                </a:solidFill>
+                <a:latin typeface="맑은 고딕"/>
+              </a:rPr>
+              <a:t> 조회 → </a:t>
+            </a:r>
+            <a:r>
+              <a:rPr sz="1700" b="1">
+                <a:solidFill>
+                  <a:srgbClr val="222222"/>
+                </a:solidFill>
+                <a:latin typeface="맑은 고딕"/>
+              </a:rPr>
+              <a:t>ORA-00904</a:t>
             </a:r>
           </a:p>
           <a:p>
@@ -8585,7 +9457,44 @@
                 </a:solidFill>
                 <a:latin typeface="맑은 고딕"/>
               </a:rPr>
-              <a:t>•  **`V$ARCHIVE_DEST`** — 목적지의 **설정**: TRANSMIT_MODE, AFFIRM, VALID_NOW, VALID_ROLE, VALID_TYPE</a:t>
+              <a:t>•  </a:t>
+            </a:r>
+            <a:r>
+              <a:rPr sz="1700" b="1">
+                <a:solidFill>
+                  <a:srgbClr val="222222"/>
+                </a:solidFill>
+                <a:latin typeface="Consolas"/>
+                <a:cs typeface="Consolas"/>
+              </a:rPr>
+              <a:t>V$ARCHIVE_DEST</a:t>
+            </a:r>
+            <a:r>
+              <a:rPr sz="1700" b="0">
+                <a:solidFill>
+                  <a:srgbClr val="222222"/>
+                </a:solidFill>
+                <a:latin typeface="맑은 고딕"/>
+              </a:rPr>
+              <a:t> — 목적지의 </a:t>
+            </a:r>
+            <a:r>
+              <a:rPr sz="1700" b="1">
+                <a:solidFill>
+                  <a:srgbClr val="222222"/>
+                </a:solidFill>
+                <a:latin typeface="맑은 고딕"/>
+              </a:rPr>
+              <a:t>설정</a:t>
+            </a:r>
+            <a:r>
+              <a:rPr sz="1700" b="0">
+                <a:solidFill>
+                  <a:srgbClr val="222222"/>
+                </a:solidFill>
+                <a:latin typeface="맑은 고딕"/>
+              </a:rPr>
+              <a:t>: TRANSMIT_MODE, AFFIRM, VALID_NOW, VALID_ROLE, VALID_TYPE</a:t>
             </a:r>
           </a:p>
           <a:p>
@@ -8601,7 +9510,44 @@
                 </a:solidFill>
                 <a:latin typeface="맑은 고딕"/>
               </a:rPr>
-              <a:t>•  **`V$ARCHIVE_DEST_STATUS`** — 목적지의 **상태**: STATUS, ERROR, RECOVERY_MODE</a:t>
+              <a:t>•  </a:t>
+            </a:r>
+            <a:r>
+              <a:rPr sz="1700" b="1">
+                <a:solidFill>
+                  <a:srgbClr val="222222"/>
+                </a:solidFill>
+                <a:latin typeface="Consolas"/>
+                <a:cs typeface="Consolas"/>
+              </a:rPr>
+              <a:t>V$ARCHIVE_DEST_STATUS</a:t>
+            </a:r>
+            <a:r>
+              <a:rPr sz="1700" b="0">
+                <a:solidFill>
+                  <a:srgbClr val="222222"/>
+                </a:solidFill>
+                <a:latin typeface="맑은 고딕"/>
+              </a:rPr>
+              <a:t> — 목적지의 </a:t>
+            </a:r>
+            <a:r>
+              <a:rPr sz="1700" b="1">
+                <a:solidFill>
+                  <a:srgbClr val="222222"/>
+                </a:solidFill>
+                <a:latin typeface="맑은 고딕"/>
+              </a:rPr>
+              <a:t>상태</a:t>
+            </a:r>
+            <a:r>
+              <a:rPr sz="1700" b="0">
+                <a:solidFill>
+                  <a:srgbClr val="222222"/>
+                </a:solidFill>
+                <a:latin typeface="맑은 고딕"/>
+              </a:rPr>
+              <a:t>: STATUS, ERROR, RECOVERY_MODE</a:t>
             </a:r>
           </a:p>
           <a:p>
@@ -8617,7 +9563,17 @@
                 </a:solidFill>
                 <a:latin typeface="맑은 고딕"/>
               </a:rPr>
-              <a:t>•  실측 — dest 2 `farsync / PARALLELSYNC / AFFIRM YES`</a:t>
+              <a:t>•  실측 — dest 2 </a:t>
+            </a:r>
+            <a:r>
+              <a:rPr sz="1700" b="0">
+                <a:solidFill>
+                  <a:srgbClr val="222222"/>
+                </a:solidFill>
+                <a:latin typeface="Consolas"/>
+                <a:cs typeface="Consolas"/>
+              </a:rPr>
+              <a:t>farsync / PARALLELSYNC / AFFIRM YES</a:t>
             </a:r>
           </a:p>
         </p:txBody>
@@ -8796,7 +9752,35 @@
                 </a:solidFill>
                 <a:latin typeface="맑은 고딕"/>
               </a:rPr>
-              <a:t>•  **farsync** — RFS 가 시퀀스 36 수신, SRL 5번 `ACTIVE`</a:t>
+              <a:t>•  </a:t>
+            </a:r>
+            <a:r>
+              <a:rPr sz="1700" b="1">
+                <a:solidFill>
+                  <a:srgbClr val="222222"/>
+                </a:solidFill>
+                <a:latin typeface="맑은 고딕"/>
+              </a:rPr>
+              <a:t>farsync</a:t>
+            </a:r>
+            <a:r>
+              <a:rPr sz="1700" b="0">
+                <a:solidFill>
+                  <a:srgbClr val="222222"/>
+                </a:solidFill>
+                <a:latin typeface="맑은 고딕"/>
+              </a:rPr>
+              <a:t> — RFS 가 시퀀스 36 수신, SRL 5번 </a:t>
+            </a:r>
+            <a:r>
+              <a:rPr sz="1700" b="0">
+                <a:solidFill>
+                  <a:srgbClr val="222222"/>
+                </a:solidFill>
+                <a:latin typeface="Consolas"/>
+                <a:cs typeface="Consolas"/>
+              </a:rPr>
+              <a:t>ACTIVE</a:t>
             </a:r>
           </a:p>
           <a:p>
@@ -8812,7 +9796,54 @@
                 </a:solidFill>
                 <a:latin typeface="맑은 고딕"/>
               </a:rPr>
-              <a:t>•  **farsync** — 로컬 아카이브 `1_30_...` ~ `1_35_1242322892.dbf`</a:t>
+              <a:t>•  </a:t>
+            </a:r>
+            <a:r>
+              <a:rPr sz="1700" b="1">
+                <a:solidFill>
+                  <a:srgbClr val="222222"/>
+                </a:solidFill>
+                <a:latin typeface="맑은 고딕"/>
+              </a:rPr>
+              <a:t>farsync</a:t>
+            </a:r>
+            <a:r>
+              <a:rPr sz="1700" b="0">
+                <a:solidFill>
+                  <a:srgbClr val="222222"/>
+                </a:solidFill>
+                <a:latin typeface="맑은 고딕"/>
+              </a:rPr>
+              <a:t> — 로컬 아카이브 </a:t>
+            </a:r>
+            <a:r>
+              <a:rPr sz="1700" b="0">
+                <a:solidFill>
+                  <a:srgbClr val="222222"/>
+                </a:solidFill>
+                <a:latin typeface="Consolas"/>
+                <a:cs typeface="Consolas"/>
+              </a:rPr>
+              <a:t>1_30_...</a:t>
+            </a:r>
+            <a:r>
+              <a:rPr sz="1700" b="0">
+                <a:solidFill>
+                  <a:srgbClr val="222222"/>
+                </a:solidFill>
+                <a:latin typeface="맑은 고딕"/>
+              </a:rPr>
+              <a:t> ~ </a:t>
+            </a:r>
+            <a:r>
+              <a:rPr sz="1700" b="0">
+                <a:solidFill>
+                  <a:srgbClr val="222222"/>
+                </a:solidFill>
+                <a:latin typeface="Consolas"/>
+                <a:cs typeface="Consolas"/>
+              </a:rPr>
+              <a:t>1_35_1242322892.dbf</a:t>
             </a:r>
           </a:p>
           <a:p>
@@ -8828,7 +9859,53 @@
                 </a:solidFill>
                 <a:latin typeface="맑은 고딕"/>
               </a:rPr>
-              <a:t>•  **boston** — transport lag / apply lag 모두 **0**, MRP0 `APPLYING_LOG 36`</a:t>
+              <a:t>•  </a:t>
+            </a:r>
+            <a:r>
+              <a:rPr sz="1700" b="1">
+                <a:solidFill>
+                  <a:srgbClr val="222222"/>
+                </a:solidFill>
+                <a:latin typeface="맑은 고딕"/>
+              </a:rPr>
+              <a:t>boston</a:t>
+            </a:r>
+            <a:r>
+              <a:rPr sz="1700" b="0">
+                <a:solidFill>
+                  <a:srgbClr val="222222"/>
+                </a:solidFill>
+                <a:latin typeface="맑은 고딕"/>
+              </a:rPr>
+              <a:t> — transport lag / apply lag 모두 </a:t>
+            </a:r>
+            <a:r>
+              <a:rPr sz="1700" b="1">
+                <a:solidFill>
+                  <a:srgbClr val="222222"/>
+                </a:solidFill>
+                <a:latin typeface="맑은 고딕"/>
+              </a:rPr>
+              <a:t>0</a:t>
+            </a:r>
+            <a:r>
+              <a:rPr sz="1700" b="0">
+                <a:solidFill>
+                  <a:srgbClr val="222222"/>
+                </a:solidFill>
+                <a:latin typeface="맑은 고딕"/>
+              </a:rPr>
+              <a:t>, MRP0 </a:t>
+            </a:r>
+            <a:r>
+              <a:rPr sz="1700" b="0">
+                <a:solidFill>
+                  <a:srgbClr val="222222"/>
+                </a:solidFill>
+                <a:latin typeface="Consolas"/>
+                <a:cs typeface="Consolas"/>
+              </a:rPr>
+              <a:t>APPLYING_LOG 36</a:t>
             </a:r>
           </a:p>
           <a:p>
@@ -8844,7 +9921,16 @@
                 </a:solidFill>
                 <a:latin typeface="맑은 고딕"/>
               </a:rPr>
-              <a:t>•  Standby 는 경로가 늘어난 것을 **구별하지 않는다**</a:t>
+              <a:t>•  Standby 는 경로가 늘어난 것을 </a:t>
+            </a:r>
+            <a:r>
+              <a:rPr sz="1700" b="1">
+                <a:solidFill>
+                  <a:srgbClr val="222222"/>
+                </a:solidFill>
+                <a:latin typeface="맑은 고딕"/>
+              </a:rPr>
+              <a:t>구별하지 않는다</a:t>
             </a:r>
           </a:p>
         </p:txBody>
@@ -9023,7 +10109,17 @@
                 </a:solidFill>
                 <a:latin typeface="맑은 고딕"/>
               </a:rPr>
-              <a:t>•  chicago — `create table system.fs_t ... insert ... commit`</a:t>
+              <a:t>•  chicago — </a:t>
+            </a:r>
+            <a:r>
+              <a:rPr sz="1700" b="0">
+                <a:solidFill>
+                  <a:srgbClr val="222222"/>
+                </a:solidFill>
+                <a:latin typeface="Consolas"/>
+                <a:cs typeface="Consolas"/>
+              </a:rPr>
+              <a:t>create table system.fs_t ... insert ... commit</a:t>
             </a:r>
           </a:p>
           <a:p>
@@ -9039,7 +10135,17 @@
                 </a:solidFill>
                 <a:latin typeface="맑은 고딕"/>
               </a:rPr>
-              <a:t>•  30초 뒤 boston — `1  via-farsync`</a:t>
+              <a:t>•  30초 뒤 boston — </a:t>
+            </a:r>
+            <a:r>
+              <a:rPr sz="1700" b="0">
+                <a:solidFill>
+                  <a:srgbClr val="222222"/>
+                </a:solidFill>
+                <a:latin typeface="Consolas"/>
+                <a:cs typeface="Consolas"/>
+              </a:rPr>
+              <a:t>1  via-farsync</a:t>
             </a:r>
           </a:p>
           <a:p>
@@ -9489,7 +10595,17 @@
                 </a:solidFill>
                 <a:latin typeface="맑은 고딕"/>
               </a:rPr>
-              <a:t>•  `ALTER DATABASE SET STANDBY DATABASE TO MAXIMIZE AVAILABILITY;`</a:t>
+              <a:t>•  </a:t>
+            </a:r>
+            <a:r>
+              <a:rPr sz="1700" b="0">
+                <a:solidFill>
+                  <a:srgbClr val="222222"/>
+                </a:solidFill>
+                <a:latin typeface="Consolas"/>
+                <a:cs typeface="Consolas"/>
+              </a:rPr>
+              <a:t>ALTER DATABASE SET STANDBY DATABASE TO MAXIMIZE AVAILABILITY;</a:t>
             </a:r>
           </a:p>
           <a:p>
@@ -9505,7 +10621,27 @@
                 </a:solidFill>
                 <a:latin typeface="맑은 고딕"/>
               </a:rPr>
-              <a:t>•  직후 — `MAXIMUM AVAILABILITY / **RESYNCHRONIZATION**`</a:t>
+              <a:t>•  직후 — </a:t>
+            </a:r>
+            <a:r>
+              <a:rPr sz="1700" b="0">
+                <a:solidFill>
+                  <a:srgbClr val="222222"/>
+                </a:solidFill>
+                <a:latin typeface="Consolas"/>
+                <a:cs typeface="Consolas"/>
+              </a:rPr>
+              <a:t>MAXIMUM AVAILABILITY / </a:t>
+            </a:r>
+            <a:r>
+              <a:rPr sz="1700" b="1">
+                <a:solidFill>
+                  <a:srgbClr val="222222"/>
+                </a:solidFill>
+                <a:latin typeface="Consolas"/>
+                <a:cs typeface="Consolas"/>
+              </a:rPr>
+              <a:t>RESYNCHRONIZATION</a:t>
             </a:r>
           </a:p>
           <a:p>
@@ -9521,7 +10657,27 @@
                 </a:solidFill>
                 <a:latin typeface="맑은 고딕"/>
               </a:rPr>
-              <a:t>•  로그가 몇 번 오간 뒤 — `MAXIMUM AVAILABILITY / **MAXIMUM AVAILABILITY**`</a:t>
+              <a:t>•  로그가 몇 번 오간 뒤 — </a:t>
+            </a:r>
+            <a:r>
+              <a:rPr sz="1700" b="0">
+                <a:solidFill>
+                  <a:srgbClr val="222222"/>
+                </a:solidFill>
+                <a:latin typeface="Consolas"/>
+                <a:cs typeface="Consolas"/>
+              </a:rPr>
+              <a:t>MAXIMUM AVAILABILITY / </a:t>
+            </a:r>
+            <a:r>
+              <a:rPr sz="1700" b="1">
+                <a:solidFill>
+                  <a:srgbClr val="222222"/>
+                </a:solidFill>
+                <a:latin typeface="Consolas"/>
+                <a:cs typeface="Consolas"/>
+              </a:rPr>
+              <a:t>MAXIMUM AVAILABILITY</a:t>
             </a:r>
           </a:p>
           <a:p>
@@ -9716,7 +10872,16 @@
                 </a:solidFill>
                 <a:latin typeface="맑은 고딕"/>
               </a:rPr>
-              <a:t>•  chicago — MAXIMUM AVAILABILITY / **MAXIMUM AVAILABILITY**</a:t>
+              <a:t>•  chicago — MAXIMUM AVAILABILITY / </a:t>
+            </a:r>
+            <a:r>
+              <a:rPr sz="1700" b="1">
+                <a:solidFill>
+                  <a:srgbClr val="222222"/>
+                </a:solidFill>
+                <a:latin typeface="맑은 고딕"/>
+              </a:rPr>
+              <a:t>MAXIMUM AVAILABILITY</a:t>
             </a:r>
           </a:p>
           <a:p>
@@ -9732,7 +10897,16 @@
                 </a:solidFill>
                 <a:latin typeface="맑은 고딕"/>
               </a:rPr>
-              <a:t>•  farsync — MAXIMUM AVAILABILITY / **MAXIMUM AVAILABILITY**</a:t>
+              <a:t>•  farsync — MAXIMUM AVAILABILITY / </a:t>
+            </a:r>
+            <a:r>
+              <a:rPr sz="1700" b="1">
+                <a:solidFill>
+                  <a:srgbClr val="222222"/>
+                </a:solidFill>
+                <a:latin typeface="맑은 고딕"/>
+              </a:rPr>
+              <a:t>MAXIMUM AVAILABILITY</a:t>
             </a:r>
           </a:p>
           <a:p>
@@ -9748,7 +10922,16 @@
                 </a:solidFill>
                 <a:latin typeface="맑은 고딕"/>
               </a:rPr>
-              <a:t>•  boston — MAXIMUM AVAILABILITY / **RESYNCHRONIZATION**</a:t>
+              <a:t>•  boston — MAXIMUM AVAILABILITY / </a:t>
+            </a:r>
+            <a:r>
+              <a:rPr sz="1700" b="1">
+                <a:solidFill>
+                  <a:srgbClr val="222222"/>
+                </a:solidFill>
+                <a:latin typeface="맑은 고딕"/>
+              </a:rPr>
+              <a:t>RESYNCHRONIZATION</a:t>
             </a:r>
           </a:p>
           <a:p>
@@ -9764,7 +10947,16 @@
                 </a:solidFill>
                 <a:latin typeface="맑은 고딕"/>
               </a:rPr>
-              <a:t>•  오류가 아니다. **boston 은 ASYNC 로 받는다**</a:t>
+              <a:t>•  오류가 아니다. </a:t>
+            </a:r>
+            <a:r>
+              <a:rPr sz="1700" b="1">
+                <a:solidFill>
+                  <a:srgbClr val="222222"/>
+                </a:solidFill>
+                <a:latin typeface="맑은 고딕"/>
+              </a:rPr>
+              <a:t>boston 은 ASYNC 로 받는다</a:t>
             </a:r>
           </a:p>
           <a:p>
@@ -9780,7 +10972,17 @@
                 </a:solidFill>
                 <a:latin typeface="맑은 고딕"/>
               </a:rPr>
-              <a:t>•  동기 보장 구간은 `chicago ↔ farsync`</a:t>
+              <a:t>•  동기 보장 구간은 </a:t>
+            </a:r>
+            <a:r>
+              <a:rPr sz="1700" b="0">
+                <a:solidFill>
+                  <a:srgbClr val="222222"/>
+                </a:solidFill>
+                <a:latin typeface="Consolas"/>
+                <a:cs typeface="Consolas"/>
+              </a:rPr>
+              <a:t>chicago ↔ farsync</a:t>
             </a:r>
           </a:p>
         </p:txBody>
@@ -9959,7 +11161,34 @@
                 </a:solidFill>
                 <a:latin typeface="맑은 고딕"/>
               </a:rPr>
-              <a:t>•  **SYNC** — 보내고 **응답을 기다린다**</a:t>
+              <a:t>•  </a:t>
+            </a:r>
+            <a:r>
+              <a:rPr sz="1700" b="1">
+                <a:solidFill>
+                  <a:srgbClr val="222222"/>
+                </a:solidFill>
+                <a:latin typeface="맑은 고딕"/>
+              </a:rPr>
+              <a:t>SYNC</a:t>
+            </a:r>
+            <a:r>
+              <a:rPr sz="1700" b="0">
+                <a:solidFill>
+                  <a:srgbClr val="222222"/>
+                </a:solidFill>
+                <a:latin typeface="맑은 고딕"/>
+              </a:rPr>
+              <a:t> — 보내고 </a:t>
+            </a:r>
+            <a:r>
+              <a:rPr sz="1700" b="1">
+                <a:solidFill>
+                  <a:srgbClr val="222222"/>
+                </a:solidFill>
+                <a:latin typeface="맑은 고딕"/>
+              </a:rPr>
+              <a:t>응답을 기다린다</a:t>
             </a:r>
           </a:p>
           <a:p>
@@ -9975,7 +11204,43 @@
                 </a:solidFill>
                 <a:latin typeface="맑은 고딕"/>
               </a:rPr>
-              <a:t>•  **AFFIRM** — 받는 쪽이 **디스크에 쓴 뒤** 응답한다</a:t>
+              <a:t>•  </a:t>
+            </a:r>
+            <a:r>
+              <a:rPr sz="1700" b="1">
+                <a:solidFill>
+                  <a:srgbClr val="222222"/>
+                </a:solidFill>
+                <a:latin typeface="맑은 고딕"/>
+              </a:rPr>
+              <a:t>AFFIRM</a:t>
+            </a:r>
+            <a:r>
+              <a:rPr sz="1700" b="0">
+                <a:solidFill>
+                  <a:srgbClr val="222222"/>
+                </a:solidFill>
+                <a:latin typeface="맑은 고딕"/>
+              </a:rPr>
+              <a:t> — 받는 쪽이 </a:t>
+            </a:r>
+            <a:r>
+              <a:rPr sz="1700" b="1">
+                <a:solidFill>
+                  <a:srgbClr val="222222"/>
+                </a:solidFill>
+                <a:latin typeface="맑은 고딕"/>
+              </a:rPr>
+              <a:t>디스크에 쓴 뒤</a:t>
+            </a:r>
+            <a:r>
+              <a:rPr sz="1700" b="0">
+                <a:solidFill>
+                  <a:srgbClr val="222222"/>
+                </a:solidFill>
+                <a:latin typeface="맑은 고딕"/>
+              </a:rPr>
+              <a:t> 응답한다</a:t>
             </a:r>
           </a:p>
           <a:p>
@@ -9991,7 +11256,26 @@
                 </a:solidFill>
                 <a:latin typeface="맑은 고딕"/>
               </a:rPr>
-              <a:t>•  `SYNC NOAFFIRM` — 메모리에 받자마자 응답. 빠르지만 잃을 수 있다</a:t>
+              <a:t>•  </a:t>
+            </a:r>
+            <a:r>
+              <a:rPr sz="1700" b="0">
+                <a:solidFill>
+                  <a:srgbClr val="222222"/>
+                </a:solidFill>
+                <a:latin typeface="Consolas"/>
+                <a:cs typeface="Consolas"/>
+              </a:rPr>
+              <a:t>SYNC NOAFFIRM</a:t>
+            </a:r>
+            <a:r>
+              <a:rPr sz="1700" b="0">
+                <a:solidFill>
+                  <a:srgbClr val="222222"/>
+                </a:solidFill>
+                <a:latin typeface="맑은 고딕"/>
+              </a:rPr>
+              <a:t> — 메모리에 받자마자 응답. 빠르지만 잃을 수 있다</a:t>
             </a:r>
           </a:p>
           <a:p>
@@ -10007,7 +11291,16 @@
                 </a:solidFill>
                 <a:latin typeface="맑은 고딕"/>
               </a:rPr>
-              <a:t>•  Far Sync 노드의 **디스크 성능이 Primary 커밋 속도에 직접 영향**</a:t>
+              <a:t>•  Far Sync 노드의 </a:t>
+            </a:r>
+            <a:r>
+              <a:rPr sz="1700" b="1">
+                <a:solidFill>
+                  <a:srgbClr val="222222"/>
+                </a:solidFill>
+                <a:latin typeface="맑은 고딕"/>
+              </a:rPr>
+              <a:t>디스크 성능이 Primary 커밋 속도에 직접 영향</a:t>
             </a:r>
           </a:p>
           <a:p>
@@ -10202,7 +11495,54 @@
                 </a:solidFill>
                 <a:latin typeface="맑은 고딕"/>
               </a:rPr>
-              <a:t>•  Primary — 목적지 `ERROR`, `PROTECTION_LEVEL` 하락. **계속 동작한다**</a:t>
+              <a:t>•  Primary — 목적지 </a:t>
+            </a:r>
+            <a:r>
+              <a:rPr sz="1700" b="0">
+                <a:solidFill>
+                  <a:srgbClr val="222222"/>
+                </a:solidFill>
+                <a:latin typeface="Consolas"/>
+                <a:cs typeface="Consolas"/>
+              </a:rPr>
+              <a:t>ERROR</a:t>
+            </a:r>
+            <a:r>
+              <a:rPr sz="1700" b="0">
+                <a:solidFill>
+                  <a:srgbClr val="222222"/>
+                </a:solidFill>
+                <a:latin typeface="맑은 고딕"/>
+              </a:rPr>
+              <a:t>, </a:t>
+            </a:r>
+            <a:r>
+              <a:rPr sz="1700" b="0">
+                <a:solidFill>
+                  <a:srgbClr val="222222"/>
+                </a:solidFill>
+                <a:latin typeface="Consolas"/>
+                <a:cs typeface="Consolas"/>
+              </a:rPr>
+              <a:t>PROTECTION_LEVEL</a:t>
+            </a:r>
+            <a:r>
+              <a:rPr sz="1700" b="0">
+                <a:solidFill>
+                  <a:srgbClr val="222222"/>
+                </a:solidFill>
+                <a:latin typeface="맑은 고딕"/>
+              </a:rPr>
+              <a:t> 하락. </a:t>
+            </a:r>
+            <a:r>
+              <a:rPr sz="1700" b="1">
+                <a:solidFill>
+                  <a:srgbClr val="222222"/>
+                </a:solidFill>
+                <a:latin typeface="맑은 고딕"/>
+              </a:rPr>
+              <a:t>계속 동작한다</a:t>
             </a:r>
           </a:p>
           <a:p>
@@ -10234,7 +11574,16 @@
                 </a:solidFill>
                 <a:latin typeface="맑은 고딕"/>
               </a:rPr>
-              <a:t>•  Standby — **리두를 받지 못한다**</a:t>
+              <a:t>•  Standby — </a:t>
+            </a:r>
+            <a:r>
+              <a:rPr sz="1700" b="1">
+                <a:solidFill>
+                  <a:srgbClr val="222222"/>
+                </a:solidFill>
+                <a:latin typeface="맑은 고딕"/>
+              </a:rPr>
+              <a:t>리두를 받지 못한다</a:t>
             </a:r>
           </a:p>
           <a:p>
@@ -10684,7 +12033,35 @@
                 </a:solidFill>
                 <a:latin typeface="맑은 고딕"/>
               </a:rPr>
-              <a:t>•  `V$DATAFILE` — **0행**</a:t>
+              <a:t>•  </a:t>
+            </a:r>
+            <a:r>
+              <a:rPr sz="1700" b="0">
+                <a:solidFill>
+                  <a:srgbClr val="222222"/>
+                </a:solidFill>
+                <a:latin typeface="Consolas"/>
+                <a:cs typeface="Consolas"/>
+              </a:rPr>
+              <a:t>V$DATAFILE</a:t>
+            </a:r>
+            <a:r>
+              <a:rPr sz="1700" b="0">
+                <a:solidFill>
+                  <a:srgbClr val="222222"/>
+                </a:solidFill>
+                <a:latin typeface="맑은 고딕"/>
+              </a:rPr>
+              <a:t> — </a:t>
+            </a:r>
+            <a:r>
+              <a:rPr sz="1700" b="1">
+                <a:solidFill>
+                  <a:srgbClr val="222222"/>
+                </a:solidFill>
+                <a:latin typeface="맑은 고딕"/>
+              </a:rPr>
+              <a:t>0행</a:t>
             </a:r>
           </a:p>
           <a:p>
@@ -10700,7 +12077,26 @@
                 </a:solidFill>
                 <a:latin typeface="맑은 고딕"/>
               </a:rPr>
-              <a:t>•  `V$TEMPFILE` — 3행 (정의만 상속. 실제 파일 없음)</a:t>
+              <a:t>•  </a:t>
+            </a:r>
+            <a:r>
+              <a:rPr sz="1700" b="0">
+                <a:solidFill>
+                  <a:srgbClr val="222222"/>
+                </a:solidFill>
+                <a:latin typeface="Consolas"/>
+                <a:cs typeface="Consolas"/>
+              </a:rPr>
+              <a:t>V$TEMPFILE</a:t>
+            </a:r>
+            <a:r>
+              <a:rPr sz="1700" b="0">
+                <a:solidFill>
+                  <a:srgbClr val="222222"/>
+                </a:solidFill>
+                <a:latin typeface="맑은 고딕"/>
+              </a:rPr>
+              <a:t> — 3행 (정의만 상속. 실제 파일 없음)</a:t>
             </a:r>
           </a:p>
           <a:p>
@@ -10716,7 +12112,26 @@
                 </a:solidFill>
                 <a:latin typeface="맑은 고딕"/>
               </a:rPr>
-              <a:t>•  `V$STANDBY_LOG` — 4행</a:t>
+              <a:t>•  </a:t>
+            </a:r>
+            <a:r>
+              <a:rPr sz="1700" b="0">
+                <a:solidFill>
+                  <a:srgbClr val="222222"/>
+                </a:solidFill>
+                <a:latin typeface="Consolas"/>
+                <a:cs typeface="Consolas"/>
+              </a:rPr>
+              <a:t>V$STANDBY_LOG</a:t>
+            </a:r>
+            <a:r>
+              <a:rPr sz="1700" b="0">
+                <a:solidFill>
+                  <a:srgbClr val="222222"/>
+                </a:solidFill>
+                <a:latin typeface="맑은 고딕"/>
+              </a:rPr>
+              <a:t> — 4행</a:t>
             </a:r>
           </a:p>
           <a:p>
@@ -10732,7 +12147,35 @@
                 </a:solidFill>
                 <a:latin typeface="맑은 고딕"/>
               </a:rPr>
-              <a:t>•  `V$LOG` — **0행**</a:t>
+              <a:t>•  </a:t>
+            </a:r>
+            <a:r>
+              <a:rPr sz="1700" b="0">
+                <a:solidFill>
+                  <a:srgbClr val="222222"/>
+                </a:solidFill>
+                <a:latin typeface="Consolas"/>
+                <a:cs typeface="Consolas"/>
+              </a:rPr>
+              <a:t>V$LOG</a:t>
+            </a:r>
+            <a:r>
+              <a:rPr sz="1700" b="0">
+                <a:solidFill>
+                  <a:srgbClr val="222222"/>
+                </a:solidFill>
+                <a:latin typeface="맑은 고딕"/>
+              </a:rPr>
+              <a:t> — </a:t>
+            </a:r>
+            <a:r>
+              <a:rPr sz="1700" b="1">
+                <a:solidFill>
+                  <a:srgbClr val="222222"/>
+                </a:solidFill>
+                <a:latin typeface="맑은 고딕"/>
+              </a:rPr>
+              <a:t>0행</a:t>
             </a:r>
           </a:p>
           <a:p>
@@ -10748,7 +12191,43 @@
                 </a:solidFill>
                 <a:latin typeface="맑은 고딕"/>
               </a:rPr>
-              <a:t>•  디스크 — oradata **819MB** + 아카이브 **107MB** (Primary 데이터는 3.2GB)</a:t>
+              <a:t>•  디스크 — oradata </a:t>
+            </a:r>
+            <a:r>
+              <a:rPr sz="1700" b="1">
+                <a:solidFill>
+                  <a:srgbClr val="222222"/>
+                </a:solidFill>
+                <a:latin typeface="맑은 고딕"/>
+              </a:rPr>
+              <a:t>819MB</a:t>
+            </a:r>
+            <a:r>
+              <a:rPr sz="1700" b="0">
+                <a:solidFill>
+                  <a:srgbClr val="222222"/>
+                </a:solidFill>
+                <a:latin typeface="맑은 고딕"/>
+              </a:rPr>
+              <a:t> + 아카이브 </a:t>
+            </a:r>
+            <a:r>
+              <a:rPr sz="1700" b="1">
+                <a:solidFill>
+                  <a:srgbClr val="222222"/>
+                </a:solidFill>
+                <a:latin typeface="맑은 고딕"/>
+              </a:rPr>
+              <a:t>107MB</a:t>
+            </a:r>
+            <a:r>
+              <a:rPr sz="1700" b="0">
+                <a:solidFill>
+                  <a:srgbClr val="222222"/>
+                </a:solidFill>
+                <a:latin typeface="맑은 고딕"/>
+              </a:rPr>
+              <a:t> (Primary 데이터는 3.2GB)</a:t>
             </a:r>
           </a:p>
         </p:txBody>
@@ -11163,7 +12642,35 @@
                 </a:solidFill>
                 <a:latin typeface="맑은 고딕"/>
               </a:rPr>
-              <a:t>•  열기 — **ORA-16476** `far sync instance does not allow Open operation`</a:t>
+              <a:t>•  열기 — </a:t>
+            </a:r>
+            <a:r>
+              <a:rPr sz="1700" b="1">
+                <a:solidFill>
+                  <a:srgbClr val="222222"/>
+                </a:solidFill>
+                <a:latin typeface="맑은 고딕"/>
+              </a:rPr>
+              <a:t>ORA-16476</a:t>
+            </a:r>
+            <a:r>
+              <a:rPr sz="1700" b="0">
+                <a:solidFill>
+                  <a:srgbClr val="222222"/>
+                </a:solidFill>
+                <a:latin typeface="맑은 고딕"/>
+              </a:rPr>
+              <a:t> </a:t>
+            </a:r>
+            <a:r>
+              <a:rPr sz="1700" b="0">
+                <a:solidFill>
+                  <a:srgbClr val="222222"/>
+                </a:solidFill>
+                <a:latin typeface="Consolas"/>
+                <a:cs typeface="Consolas"/>
+              </a:rPr>
+              <a:t>far sync instance does not allow Open operation</a:t>
             </a:r>
           </a:p>
           <a:p>
@@ -11179,7 +12686,35 @@
                 </a:solidFill>
                 <a:latin typeface="맑은 고딕"/>
               </a:rPr>
-              <a:t>•  적용 — **ORA-01665** `control file is not a standby control file`</a:t>
+              <a:t>•  적용 — </a:t>
+            </a:r>
+            <a:r>
+              <a:rPr sz="1700" b="1">
+                <a:solidFill>
+                  <a:srgbClr val="222222"/>
+                </a:solidFill>
+                <a:latin typeface="맑은 고딕"/>
+              </a:rPr>
+              <a:t>ORA-01665</a:t>
+            </a:r>
+            <a:r>
+              <a:rPr sz="1700" b="0">
+                <a:solidFill>
+                  <a:srgbClr val="222222"/>
+                </a:solidFill>
+                <a:latin typeface="맑은 고딕"/>
+              </a:rPr>
+              <a:t> </a:t>
+            </a:r>
+            <a:r>
+              <a:rPr sz="1700" b="0">
+                <a:solidFill>
+                  <a:srgbClr val="222222"/>
+                </a:solidFill>
+                <a:latin typeface="Consolas"/>
+                <a:cs typeface="Consolas"/>
+              </a:rPr>
+              <a:t>control file is not a standby control file</a:t>
             </a:r>
           </a:p>
           <a:p>
@@ -11211,7 +12746,25 @@
                 </a:solidFill>
                 <a:latin typeface="맑은 고딕"/>
               </a:rPr>
-              <a:t>•  판단이 **컨트롤 파일 유형** 수준에서 이뤄진다</a:t>
+              <a:t>•  판단이 </a:t>
+            </a:r>
+            <a:r>
+              <a:rPr sz="1700" b="1">
+                <a:solidFill>
+                  <a:srgbClr val="222222"/>
+                </a:solidFill>
+                <a:latin typeface="맑은 고딕"/>
+              </a:rPr>
+              <a:t>컨트롤 파일 유형</a:t>
+            </a:r>
+            <a:r>
+              <a:rPr sz="1700" b="0">
+                <a:solidFill>
+                  <a:srgbClr val="222222"/>
+                </a:solidFill>
+                <a:latin typeface="맑은 고딕"/>
+              </a:rPr>
+              <a:t> 수준에서 이뤄진다</a:t>
             </a:r>
           </a:p>
         </p:txBody>
@@ -11406,7 +12959,16 @@
                 </a:solidFill>
                 <a:latin typeface="맑은 고딕"/>
               </a:rPr>
-              <a:t>•  리두 수신·SRL 기록·로컬 아카이브 — Standby, **Far Sync**</a:t>
+              <a:t>•  리두 수신·SRL 기록·로컬 아카이브 — Standby, </a:t>
+            </a:r>
+            <a:r>
+              <a:rPr sz="1700" b="1">
+                <a:solidFill>
+                  <a:srgbClr val="222222"/>
+                </a:solidFill>
+                <a:latin typeface="맑은 고딕"/>
+              </a:rPr>
+              <a:t>Far Sync</a:t>
             </a:r>
           </a:p>
           <a:p>
@@ -11422,7 +12984,16 @@
                 </a:solidFill>
                 <a:latin typeface="맑은 고딕"/>
               </a:rPr>
-              <a:t>•  다음 목적지 전달 — Primary, Standby(설정하면), **Far Sync(주 역할)**</a:t>
+              <a:t>•  다음 목적지 전달 — Primary, Standby(설정하면), </a:t>
+            </a:r>
+            <a:r>
+              <a:rPr sz="1700" b="1">
+                <a:solidFill>
+                  <a:srgbClr val="222222"/>
+                </a:solidFill>
+                <a:latin typeface="맑은 고딕"/>
+              </a:rPr>
+              <a:t>Far Sync(주 역할)</a:t>
             </a:r>
           </a:p>
           <a:p>
@@ -11438,7 +13009,16 @@
                 </a:solidFill>
                 <a:latin typeface="맑은 고딕"/>
               </a:rPr>
-              <a:t>•  리두 적용 — Standby 만. Far Sync 는 **ORA-01665**</a:t>
+              <a:t>•  리두 적용 — Standby 만. Far Sync 는 </a:t>
+            </a:r>
+            <a:r>
+              <a:rPr sz="1700" b="1">
+                <a:solidFill>
+                  <a:srgbClr val="222222"/>
+                </a:solidFill>
+                <a:latin typeface="맑은 고딕"/>
+              </a:rPr>
+              <a:t>ORA-01665</a:t>
             </a:r>
           </a:p>
           <a:p>
@@ -11454,7 +13034,16 @@
                 </a:solidFill>
                 <a:latin typeface="맑은 고딕"/>
               </a:rPr>
-              <a:t>•  데이터 파일 / 조회 서비스 — Far Sync 는 **없음 / ORA-16476**</a:t>
+              <a:t>•  데이터 파일 / 조회 서비스 — Far Sync 는 </a:t>
+            </a:r>
+            <a:r>
+              <a:rPr sz="1700" b="1">
+                <a:solidFill>
+                  <a:srgbClr val="222222"/>
+                </a:solidFill>
+                <a:latin typeface="맑은 고딕"/>
+              </a:rPr>
+              <a:t>없음 / ORA-16476</a:t>
             </a:r>
           </a:p>
         </p:txBody>
@@ -11888,7 +13477,43 @@
                 </a:solidFill>
                 <a:latin typeface="맑은 고딕"/>
               </a:rPr>
-              <a:t>•  **주체** — 데이터를 **가진** 진짜 Standby</a:t>
+              <a:t>•  </a:t>
+            </a:r>
+            <a:r>
+              <a:rPr sz="1700" b="1">
+                <a:solidFill>
+                  <a:srgbClr val="222222"/>
+                </a:solidFill>
+                <a:latin typeface="맑은 고딕"/>
+              </a:rPr>
+              <a:t>주체</a:t>
+            </a:r>
+            <a:r>
+              <a:rPr sz="1700" b="0">
+                <a:solidFill>
+                  <a:srgbClr val="222222"/>
+                </a:solidFill>
+                <a:latin typeface="맑은 고딕"/>
+              </a:rPr>
+              <a:t> — 데이터를 </a:t>
+            </a:r>
+            <a:r>
+              <a:rPr sz="1700" b="1">
+                <a:solidFill>
+                  <a:srgbClr val="222222"/>
+                </a:solidFill>
+                <a:latin typeface="맑은 고딕"/>
+              </a:rPr>
+              <a:t>가진</a:t>
+            </a:r>
+            <a:r>
+              <a:rPr sz="1700" b="0">
+                <a:solidFill>
+                  <a:srgbClr val="222222"/>
+                </a:solidFill>
+                <a:latin typeface="맑은 고딕"/>
+              </a:rPr>
+              <a:t> 진짜 Standby</a:t>
             </a:r>
           </a:p>
           <a:p>
@@ -11904,7 +13529,34 @@
                 </a:solidFill>
                 <a:latin typeface="맑은 고딕"/>
               </a:rPr>
-              <a:t>•  **목적** — 무손실이 아니라 **계층적 배포**</a:t>
+              <a:t>•  </a:t>
+            </a:r>
+            <a:r>
+              <a:rPr sz="1700" b="1">
+                <a:solidFill>
+                  <a:srgbClr val="222222"/>
+                </a:solidFill>
+                <a:latin typeface="맑은 고딕"/>
+              </a:rPr>
+              <a:t>목적</a:t>
+            </a:r>
+            <a:r>
+              <a:rPr sz="1700" b="0">
+                <a:solidFill>
+                  <a:srgbClr val="222222"/>
+                </a:solidFill>
+                <a:latin typeface="맑은 고딕"/>
+              </a:rPr>
+              <a:t> — 무손실이 아니라 </a:t>
+            </a:r>
+            <a:r>
+              <a:rPr sz="1700" b="1">
+                <a:solidFill>
+                  <a:srgbClr val="222222"/>
+                </a:solidFill>
+                <a:latin typeface="맑은 고딕"/>
+              </a:rPr>
+              <a:t>계층적 배포</a:t>
             </a:r>
           </a:p>
           <a:p>
@@ -11936,7 +13588,16 @@
                 </a:solidFill>
                 <a:latin typeface="맑은 고딕"/>
               </a:rPr>
-              <a:t>•  Far Sync 와 달리 **적용도 하고 전달도 한다**</a:t>
+              <a:t>•  Far Sync 와 달리 </a:t>
+            </a:r>
+            <a:r>
+              <a:rPr sz="1700" b="1">
+                <a:solidFill>
+                  <a:srgbClr val="222222"/>
+                </a:solidFill>
+                <a:latin typeface="맑은 고딕"/>
+              </a:rPr>
+              <a:t>적용도 하고 전달도 한다</a:t>
             </a:r>
           </a:p>
         </p:txBody>
@@ -12115,7 +13776,37 @@
                 </a:solidFill>
                 <a:latin typeface="맑은 고딕"/>
               </a:rPr>
-              <a:t>•  `log_archive_dest_3='service=farsync **sync affirm** valid_for=(standby_logfiles,standby_role)...'`</a:t>
+              <a:t>•  </a:t>
+            </a:r>
+            <a:r>
+              <a:rPr sz="1700" b="0">
+                <a:solidFill>
+                  <a:srgbClr val="222222"/>
+                </a:solidFill>
+                <a:latin typeface="Consolas"/>
+                <a:cs typeface="Consolas"/>
+              </a:rPr>
+              <a:t>log_archive_dest_3='service=farsync </a:t>
+            </a:r>
+            <a:r>
+              <a:rPr sz="1700" b="1">
+                <a:solidFill>
+                  <a:srgbClr val="222222"/>
+                </a:solidFill>
+                <a:latin typeface="Consolas"/>
+                <a:cs typeface="Consolas"/>
+              </a:rPr>
+              <a:t>sync affirm</a:t>
+            </a:r>
+            <a:r>
+              <a:rPr sz="1700" b="0">
+                <a:solidFill>
+                  <a:srgbClr val="222222"/>
+                </a:solidFill>
+                <a:latin typeface="Consolas"/>
+                <a:cs typeface="Consolas"/>
+              </a:rPr>
+              <a:t> valid_for=(standby_logfiles,standby_role)...'</a:t>
             </a:r>
           </a:p>
           <a:p>
@@ -12131,7 +13822,54 @@
                 </a:solidFill>
                 <a:latin typeface="맑은 고딕"/>
               </a:rPr>
-              <a:t>•  결과 — **오류 없이 받아들여졌다.** STATUS `VALID`, TRANSMIT_MODE `PARALLELSYNC`</a:t>
+              <a:t>•  결과 — </a:t>
+            </a:r>
+            <a:r>
+              <a:rPr sz="1700" b="1">
+                <a:solidFill>
+                  <a:srgbClr val="222222"/>
+                </a:solidFill>
+                <a:latin typeface="맑은 고딕"/>
+              </a:rPr>
+              <a:t>오류 없이 받아들여졌다.</a:t>
+            </a:r>
+            <a:r>
+              <a:rPr sz="1700" b="0">
+                <a:solidFill>
+                  <a:srgbClr val="222222"/>
+                </a:solidFill>
+                <a:latin typeface="맑은 고딕"/>
+              </a:rPr>
+              <a:t> STATUS </a:t>
+            </a:r>
+            <a:r>
+              <a:rPr sz="1700" b="0">
+                <a:solidFill>
+                  <a:srgbClr val="222222"/>
+                </a:solidFill>
+                <a:latin typeface="Consolas"/>
+                <a:cs typeface="Consolas"/>
+              </a:rPr>
+              <a:t>VALID</a:t>
+            </a:r>
+            <a:r>
+              <a:rPr sz="1700" b="0">
+                <a:solidFill>
+                  <a:srgbClr val="222222"/>
+                </a:solidFill>
+                <a:latin typeface="맑은 고딕"/>
+              </a:rPr>
+              <a:t>, TRANSMIT_MODE </a:t>
+            </a:r>
+            <a:r>
+              <a:rPr sz="1700" b="0">
+                <a:solidFill>
+                  <a:srgbClr val="222222"/>
+                </a:solidFill>
+                <a:latin typeface="Consolas"/>
+                <a:cs typeface="Consolas"/>
+              </a:rPr>
+              <a:t>PARALLELSYNC</a:t>
             </a:r>
           </a:p>
           <a:p>
@@ -12163,7 +13901,16 @@
                 </a:solidFill>
                 <a:latin typeface="맑은 고딕"/>
               </a:rPr>
-              <a:t>•  **파라미터 수준에서는 거부되지 않는다**</a:t>
+              <a:t>•  </a:t>
+            </a:r>
+            <a:r>
+              <a:rPr sz="1700" b="1">
+                <a:solidFill>
+                  <a:srgbClr val="222222"/>
+                </a:solidFill>
+                <a:latin typeface="맑은 고딕"/>
+              </a:rPr>
+              <a:t>파라미터 수준에서는 거부되지 않는다</a:t>
             </a:r>
           </a:p>
           <a:p>
@@ -12179,7 +13926,16 @@
                 </a:solidFill>
                 <a:latin typeface="맑은 고딕"/>
               </a:rPr>
-              <a:t>•  그래도 **ASYNC 를 명시하는 것이 옳다**</a:t>
+              <a:t>•  그래도 </a:t>
+            </a:r>
+            <a:r>
+              <a:rPr sz="1700" b="1">
+                <a:solidFill>
+                  <a:srgbClr val="222222"/>
+                </a:solidFill>
+                <a:latin typeface="맑은 고딕"/>
+              </a:rPr>
+              <a:t>ASYNC 를 명시하는 것이 옳다</a:t>
             </a:r>
           </a:p>
         </p:txBody>
@@ -12358,7 +14114,26 @@
                 </a:solidFill>
                 <a:latin typeface="맑은 고딕"/>
               </a:rPr>
-              <a:t>•  잘못 준 값 — `valid_for=(online_logfiles,primary_role)` (Standby 에)</a:t>
+              <a:t>•  잘못 준 값 — </a:t>
+            </a:r>
+            <a:r>
+              <a:rPr sz="1700" b="0">
+                <a:solidFill>
+                  <a:srgbClr val="222222"/>
+                </a:solidFill>
+                <a:latin typeface="Consolas"/>
+                <a:cs typeface="Consolas"/>
+              </a:rPr>
+              <a:t>valid_for=(online_logfiles,primary_role)</a:t>
+            </a:r>
+            <a:r>
+              <a:rPr sz="1700" b="0">
+                <a:solidFill>
+                  <a:srgbClr val="222222"/>
+                </a:solidFill>
+                <a:latin typeface="맑은 고딕"/>
+              </a:rPr>
+              <a:t> (Standby 에)</a:t>
             </a:r>
           </a:p>
           <a:p>
@@ -12374,7 +14149,56 @@
                 </a:solidFill>
                 <a:latin typeface="맑은 고딕"/>
               </a:rPr>
-              <a:t>•  결과 — `STATUS **VALID**` / `VALID_NOW **WRONG VALID_TYPE**`</a:t>
+              <a:t>•  결과 — </a:t>
+            </a:r>
+            <a:r>
+              <a:rPr sz="1700" b="0">
+                <a:solidFill>
+                  <a:srgbClr val="222222"/>
+                </a:solidFill>
+                <a:latin typeface="Consolas"/>
+                <a:cs typeface="Consolas"/>
+              </a:rPr>
+              <a:t>STATUS </a:t>
+            </a:r>
+            <a:r>
+              <a:rPr sz="1700" b="1">
+                <a:solidFill>
+                  <a:srgbClr val="222222"/>
+                </a:solidFill>
+                <a:latin typeface="Consolas"/>
+                <a:cs typeface="Consolas"/>
+              </a:rPr>
+              <a:t>VALID</a:t>
+            </a:r>
+            <a:r>
+              <a:rPr sz="1700" b="0">
+                <a:solidFill>
+                  <a:srgbClr val="222222"/>
+                </a:solidFill>
+                <a:latin typeface="맑은 고딕"/>
+              </a:rPr>
+              <a:t> / </a:t>
+            </a:r>
+            <a:r>
+              <a:rPr sz="1700" b="0">
+                <a:solidFill>
+                  <a:srgbClr val="222222"/>
+                </a:solidFill>
+                <a:latin typeface="Consolas"/>
+                <a:cs typeface="Consolas"/>
+              </a:rPr>
+              <a:t>VALID_NOW </a:t>
+            </a:r>
+            <a:r>
+              <a:rPr sz="1700" b="1">
+                <a:solidFill>
+                  <a:srgbClr val="222222"/>
+                </a:solidFill>
+                <a:latin typeface="Consolas"/>
+                <a:cs typeface="Consolas"/>
+              </a:rPr>
+              <a:t>WRONG VALID_TYPE</a:t>
             </a:r>
           </a:p>
           <a:p>
@@ -12390,7 +14214,36 @@
                 </a:solidFill>
                 <a:latin typeface="맑은 고딕"/>
               </a:rPr>
-              <a:t>•  `VALID_ROLE PRIMARY_ROLE` / `VALID_TYPE ONLINE_LOGFILE`</a:t>
+              <a:t>•  </a:t>
+            </a:r>
+            <a:r>
+              <a:rPr sz="1700" b="0">
+                <a:solidFill>
+                  <a:srgbClr val="222222"/>
+                </a:solidFill>
+                <a:latin typeface="Consolas"/>
+                <a:cs typeface="Consolas"/>
+              </a:rPr>
+              <a:t>VALID_ROLE PRIMARY_ROLE</a:t>
+            </a:r>
+            <a:r>
+              <a:rPr sz="1700" b="0">
+                <a:solidFill>
+                  <a:srgbClr val="222222"/>
+                </a:solidFill>
+                <a:latin typeface="맑은 고딕"/>
+              </a:rPr>
+              <a:t> / </a:t>
+            </a:r>
+            <a:r>
+              <a:rPr sz="1700" b="0">
+                <a:solidFill>
+                  <a:srgbClr val="222222"/>
+                </a:solidFill>
+                <a:latin typeface="Consolas"/>
+                <a:cs typeface="Consolas"/>
+              </a:rPr>
+              <a:t>VALID_TYPE ONLINE_LOGFILE</a:t>
             </a:r>
           </a:p>
           <a:p>
@@ -12406,7 +14259,16 @@
                 </a:solidFill>
                 <a:latin typeface="맑은 고딕"/>
               </a:rPr>
-              <a:t>•  **STATUS 만 보면 정상으로 보인다**</a:t>
+              <a:t>•  </a:t>
+            </a:r>
+            <a:r>
+              <a:rPr sz="1700" b="1">
+                <a:solidFill>
+                  <a:srgbClr val="222222"/>
+                </a:solidFill>
+                <a:latin typeface="맑은 고딕"/>
+              </a:rPr>
+              <a:t>STATUS 만 보면 정상으로 보인다</a:t>
             </a:r>
           </a:p>
           <a:p>
@@ -12601,7 +14463,25 @@
                 </a:solidFill>
                 <a:latin typeface="맑은 고딕"/>
               </a:rPr>
-              <a:t>•  **YES** — 지금 이 역할에서 쓰인다</a:t>
+              <a:t>•  </a:t>
+            </a:r>
+            <a:r>
+              <a:rPr sz="1700" b="1">
+                <a:solidFill>
+                  <a:srgbClr val="222222"/>
+                </a:solidFill>
+                <a:latin typeface="맑은 고딕"/>
+              </a:rPr>
+              <a:t>YES</a:t>
+            </a:r>
+            <a:r>
+              <a:rPr sz="1700" b="0">
+                <a:solidFill>
+                  <a:srgbClr val="222222"/>
+                </a:solidFill>
+                <a:latin typeface="맑은 고딕"/>
+              </a:rPr>
+              <a:t> — 지금 이 역할에서 쓰인다</a:t>
             </a:r>
           </a:p>
           <a:p>
@@ -12617,7 +14497,25 @@
                 </a:solidFill>
                 <a:latin typeface="맑은 고딕"/>
               </a:rPr>
-              <a:t>•  **WRONG VALID_TYPE** — 설정이 지금 역할과 맞지 않는다</a:t>
+              <a:t>•  </a:t>
+            </a:r>
+            <a:r>
+              <a:rPr sz="1700" b="1">
+                <a:solidFill>
+                  <a:srgbClr val="222222"/>
+                </a:solidFill>
+                <a:latin typeface="맑은 고딕"/>
+              </a:rPr>
+              <a:t>WRONG VALID_TYPE</a:t>
+            </a:r>
+            <a:r>
+              <a:rPr sz="1700" b="0">
+                <a:solidFill>
+                  <a:srgbClr val="222222"/>
+                </a:solidFill>
+                <a:latin typeface="맑은 고딕"/>
+              </a:rPr>
+              <a:t> — 설정이 지금 역할과 맞지 않는다</a:t>
             </a:r>
           </a:p>
           <a:p>
@@ -12633,7 +14531,25 @@
                 </a:solidFill>
                 <a:latin typeface="맑은 고딕"/>
               </a:rPr>
-              <a:t>•  **UNKNOWN** — 아직 판단할 근거가 없다 (막 설정한 직후)</a:t>
+              <a:t>•  </a:t>
+            </a:r>
+            <a:r>
+              <a:rPr sz="1700" b="1">
+                <a:solidFill>
+                  <a:srgbClr val="222222"/>
+                </a:solidFill>
+                <a:latin typeface="맑은 고딕"/>
+              </a:rPr>
+              <a:t>UNKNOWN</a:t>
+            </a:r>
+            <a:r>
+              <a:rPr sz="1700" b="0">
+                <a:solidFill>
+                  <a:srgbClr val="222222"/>
+                </a:solidFill>
+                <a:latin typeface="맑은 고딕"/>
+              </a:rPr>
+              <a:t> — 아직 판단할 근거가 없다 (막 설정한 직후)</a:t>
             </a:r>
           </a:p>
           <a:p>
@@ -13067,7 +14983,73 @@
                 </a:solidFill>
                 <a:latin typeface="맑은 고딕"/>
               </a:rPr>
-              <a:t>•  **①** 계단식 목적지 해제 — `DEFER` 후 `log_archive_dest_3=''` → `INACTIVE`</a:t>
+              <a:t>•  </a:t>
+            </a:r>
+            <a:r>
+              <a:rPr sz="1700" b="1">
+                <a:solidFill>
+                  <a:srgbClr val="222222"/>
+                </a:solidFill>
+                <a:latin typeface="맑은 고딕"/>
+              </a:rPr>
+              <a:t>①</a:t>
+            </a:r>
+            <a:r>
+              <a:rPr sz="1700" b="0">
+                <a:solidFill>
+                  <a:srgbClr val="222222"/>
+                </a:solidFill>
+                <a:latin typeface="맑은 고딕"/>
+              </a:rPr>
+              <a:t> 계단식 목적지 해제 — </a:t>
+            </a:r>
+            <a:r>
+              <a:rPr sz="1700" b="0">
+                <a:solidFill>
+                  <a:srgbClr val="222222"/>
+                </a:solidFill>
+                <a:latin typeface="Consolas"/>
+                <a:cs typeface="Consolas"/>
+              </a:rPr>
+              <a:t>DEFER</a:t>
+            </a:r>
+            <a:r>
+              <a:rPr sz="1700" b="0">
+                <a:solidFill>
+                  <a:srgbClr val="222222"/>
+                </a:solidFill>
+                <a:latin typeface="맑은 고딕"/>
+              </a:rPr>
+              <a:t> 후 </a:t>
+            </a:r>
+            <a:r>
+              <a:rPr sz="1700" b="0">
+                <a:solidFill>
+                  <a:srgbClr val="222222"/>
+                </a:solidFill>
+                <a:latin typeface="Consolas"/>
+                <a:cs typeface="Consolas"/>
+              </a:rPr>
+              <a:t>log_archive_dest_3=''</a:t>
+            </a:r>
+            <a:r>
+              <a:rPr sz="1700" b="0">
+                <a:solidFill>
+                  <a:srgbClr val="222222"/>
+                </a:solidFill>
+                <a:latin typeface="맑은 고딕"/>
+              </a:rPr>
+              <a:t> → </a:t>
+            </a:r>
+            <a:r>
+              <a:rPr sz="1700" b="0">
+                <a:solidFill>
+                  <a:srgbClr val="222222"/>
+                </a:solidFill>
+                <a:latin typeface="Consolas"/>
+                <a:cs typeface="Consolas"/>
+              </a:rPr>
+              <a:t>INACTIVE</a:t>
             </a:r>
           </a:p>
           <a:p>
@@ -13083,7 +15065,35 @@
                 </a:solidFill>
                 <a:latin typeface="맑은 고딕"/>
               </a:rPr>
-              <a:t>•  **②** 보호 모드 하향 — `TO MAXIMIZE PERFORMANCE`</a:t>
+              <a:t>•  </a:t>
+            </a:r>
+            <a:r>
+              <a:rPr sz="1700" b="1">
+                <a:solidFill>
+                  <a:srgbClr val="222222"/>
+                </a:solidFill>
+                <a:latin typeface="맑은 고딕"/>
+              </a:rPr>
+              <a:t>②</a:t>
+            </a:r>
+            <a:r>
+              <a:rPr sz="1700" b="0">
+                <a:solidFill>
+                  <a:srgbClr val="222222"/>
+                </a:solidFill>
+                <a:latin typeface="맑은 고딕"/>
+              </a:rPr>
+              <a:t> 보호 모드 하향 — </a:t>
+            </a:r>
+            <a:r>
+              <a:rPr sz="1700" b="0">
+                <a:solidFill>
+                  <a:srgbClr val="222222"/>
+                </a:solidFill>
+                <a:latin typeface="Consolas"/>
+                <a:cs typeface="Consolas"/>
+              </a:rPr>
+              <a:t>TO MAXIMIZE PERFORMANCE</a:t>
             </a:r>
           </a:p>
           <a:p>
@@ -13099,7 +15109,25 @@
                 </a:solidFill>
                 <a:latin typeface="맑은 고딕"/>
               </a:rPr>
-              <a:t>•  **③** 목적지를 boston 직결로</a:t>
+              <a:t>•  </a:t>
+            </a:r>
+            <a:r>
+              <a:rPr sz="1700" b="1">
+                <a:solidFill>
+                  <a:srgbClr val="222222"/>
+                </a:solidFill>
+                <a:latin typeface="맑은 고딕"/>
+              </a:rPr>
+              <a:t>③</a:t>
+            </a:r>
+            <a:r>
+              <a:rPr sz="1700" b="0">
+                <a:solidFill>
+                  <a:srgbClr val="222222"/>
+                </a:solidFill>
+                <a:latin typeface="맑은 고딕"/>
+              </a:rPr>
+              <a:t> 목적지를 boston 직결로</a:t>
             </a:r>
           </a:p>
           <a:p>
@@ -13115,7 +15143,26 @@
                 </a:solidFill>
                 <a:latin typeface="맑은 고딕"/>
               </a:rPr>
-              <a:t>•  반대로 하면 — 동기 대상 없는 `MAXIMUM AVAILABILITY` 상태가 된다</a:t>
+              <a:t>•  반대로 하면 — 동기 대상 없는 </a:t>
+            </a:r>
+            <a:r>
+              <a:rPr sz="1700" b="0">
+                <a:solidFill>
+                  <a:srgbClr val="222222"/>
+                </a:solidFill>
+                <a:latin typeface="Consolas"/>
+                <a:cs typeface="Consolas"/>
+              </a:rPr>
+              <a:t>MAXIMUM AVAILABILITY</a:t>
+            </a:r>
+            <a:r>
+              <a:rPr sz="1700" b="0">
+                <a:solidFill>
+                  <a:srgbClr val="222222"/>
+                </a:solidFill>
+                <a:latin typeface="맑은 고딕"/>
+              </a:rPr>
+              <a:t> 상태가 된다</a:t>
             </a:r>
           </a:p>
           <a:p>
@@ -13131,7 +15178,26 @@
                 </a:solidFill>
                 <a:latin typeface="맑은 고딕"/>
               </a:rPr>
-              <a:t>•  `log_archive_config` 의 세 이름은 그대로 둔다</a:t>
+              <a:t>•  </a:t>
+            </a:r>
+            <a:r>
+              <a:rPr sz="1700" b="0">
+                <a:solidFill>
+                  <a:srgbClr val="222222"/>
+                </a:solidFill>
+                <a:latin typeface="Consolas"/>
+                <a:cs typeface="Consolas"/>
+              </a:rPr>
+              <a:t>log_archive_config</a:t>
+            </a:r>
+            <a:r>
+              <a:rPr sz="1700" b="0">
+                <a:solidFill>
+                  <a:srgbClr val="222222"/>
+                </a:solidFill>
+                <a:latin typeface="맑은 고딕"/>
+              </a:rPr>
+              <a:t> 의 세 이름은 그대로 둔다</a:t>
             </a:r>
           </a:p>
         </p:txBody>
@@ -13310,7 +15376,25 @@
                 </a:solidFill>
                 <a:latin typeface="맑은 고딕"/>
               </a:rPr>
-              <a:t>•  **① 무손실이 요건이다** — 아니면 비동기 직결이 단순하고 싸다</a:t>
+              <a:t>•  </a:t>
+            </a:r>
+            <a:r>
+              <a:rPr sz="1700" b="1">
+                <a:solidFill>
+                  <a:srgbClr val="222222"/>
+                </a:solidFill>
+                <a:latin typeface="맑은 고딕"/>
+              </a:rPr>
+              <a:t>① 무손실이 요건이다</a:t>
+            </a:r>
+            <a:r>
+              <a:rPr sz="1700" b="0">
+                <a:solidFill>
+                  <a:srgbClr val="222222"/>
+                </a:solidFill>
+                <a:latin typeface="맑은 고딕"/>
+              </a:rPr>
+              <a:t> — 아니면 비동기 직결이 단순하고 싸다</a:t>
             </a:r>
           </a:p>
           <a:p>
@@ -13326,7 +15410,25 @@
                 </a:solidFill>
                 <a:latin typeface="맑은 고딕"/>
               </a:rPr>
-              <a:t>•  **② 재해 복구 센터가 멀다** — 가까우면 직접 동기 전송하면 된다</a:t>
+              <a:t>•  </a:t>
+            </a:r>
+            <a:r>
+              <a:rPr sz="1700" b="1">
+                <a:solidFill>
+                  <a:srgbClr val="222222"/>
+                </a:solidFill>
+                <a:latin typeface="맑은 고딕"/>
+              </a:rPr>
+              <a:t>② 재해 복구 센터가 멀다</a:t>
+            </a:r>
+            <a:r>
+              <a:rPr sz="1700" b="0">
+                <a:solidFill>
+                  <a:srgbClr val="222222"/>
+                </a:solidFill>
+                <a:latin typeface="맑은 고딕"/>
+              </a:rPr>
+              <a:t> — 가까우면 직접 동기 전송하면 된다</a:t>
             </a:r>
           </a:p>
           <a:p>
@@ -13342,7 +15444,16 @@
                 </a:solidFill>
                 <a:latin typeface="맑은 고딕"/>
               </a:rPr>
-              <a:t>•  **③ 추가 노드를 감당할 수 있다**</a:t>
+              <a:t>•  </a:t>
+            </a:r>
+            <a:r>
+              <a:rPr sz="1700" b="1">
+                <a:solidFill>
+                  <a:srgbClr val="222222"/>
+                </a:solidFill>
+                <a:latin typeface="맑은 고딕"/>
+              </a:rPr>
+              <a:t>③ 추가 노드를 감당할 수 있다</a:t>
             </a:r>
           </a:p>
           <a:p>
@@ -13769,7 +15880,25 @@
                 </a:solidFill>
                 <a:latin typeface="맑은 고딕"/>
               </a:rPr>
-              <a:t>•  Far Sync 는 **거리와 동기 전송의 모순**을 푼다. 가까운 곳과만 동기로 대화한다.</a:t>
+              <a:t>•  Far Sync 는 </a:t>
+            </a:r>
+            <a:r>
+              <a:rPr sz="1600" b="1">
+                <a:solidFill>
+                  <a:srgbClr val="222222"/>
+                </a:solidFill>
+                <a:latin typeface="맑은 고딕"/>
+              </a:rPr>
+              <a:t>거리와 동기 전송의 모순</a:t>
+            </a:r>
+            <a:r>
+              <a:rPr sz="1600" b="0">
+                <a:solidFill>
+                  <a:srgbClr val="222222"/>
+                </a:solidFill>
+                <a:latin typeface="맑은 고딕"/>
+              </a:rPr>
+              <a:t>을 푼다. 가까운 곳과만 동기로 대화한다.</a:t>
             </a:r>
           </a:p>
           <a:p>
@@ -13785,7 +15914,26 @@
                 </a:solidFill>
                 <a:latin typeface="맑은 고딕"/>
               </a:rPr>
-              <a:t>•  컨트롤 파일은 Primary 가 만든다 — 실측 18,989,056바이트. `FAR SYNC` 는 띄어 쓴다(붙이면 ORA-00900).</a:t>
+              <a:t>•  컨트롤 파일은 Primary 가 만든다 — 실측 18,989,056바이트. </a:t>
+            </a:r>
+            <a:r>
+              <a:rPr sz="1600" b="0">
+                <a:solidFill>
+                  <a:srgbClr val="222222"/>
+                </a:solidFill>
+                <a:latin typeface="Consolas"/>
+                <a:cs typeface="Consolas"/>
+              </a:rPr>
+              <a:t>FAR SYNC</a:t>
+            </a:r>
+            <a:r>
+              <a:rPr sz="1600" b="0">
+                <a:solidFill>
+                  <a:srgbClr val="222222"/>
+                </a:solidFill>
+                <a:latin typeface="맑은 고딕"/>
+              </a:rPr>
+              <a:t> 는 띄어 쓴다(붙이면 ORA-00900).</a:t>
             </a:r>
           </a:p>
           <a:p>
@@ -13801,7 +15949,64 @@
                 </a:solidFill>
                 <a:latin typeface="맑은 고딕"/>
               </a:rPr>
-              <a:t>•  `STARTUP MOUNT` 한 번으로 뜬다. `DATABASE_ROLE`=FAR SYNC, `CONTROLFILE_TYPE`=FARSYNC.</a:t>
+              <a:t>•  </a:t>
+            </a:r>
+            <a:r>
+              <a:rPr sz="1600" b="0">
+                <a:solidFill>
+                  <a:srgbClr val="222222"/>
+                </a:solidFill>
+                <a:latin typeface="Consolas"/>
+                <a:cs typeface="Consolas"/>
+              </a:rPr>
+              <a:t>STARTUP MOUNT</a:t>
+            </a:r>
+            <a:r>
+              <a:rPr sz="1600" b="0">
+                <a:solidFill>
+                  <a:srgbClr val="222222"/>
+                </a:solidFill>
+                <a:latin typeface="맑은 고딕"/>
+              </a:rPr>
+              <a:t> 한 번으로 뜬다. </a:t>
+            </a:r>
+            <a:r>
+              <a:rPr sz="1600" b="0">
+                <a:solidFill>
+                  <a:srgbClr val="222222"/>
+                </a:solidFill>
+                <a:latin typeface="Consolas"/>
+                <a:cs typeface="Consolas"/>
+              </a:rPr>
+              <a:t>DATABASE_ROLE</a:t>
+            </a:r>
+            <a:r>
+              <a:rPr sz="1600" b="0">
+                <a:solidFill>
+                  <a:srgbClr val="222222"/>
+                </a:solidFill>
+                <a:latin typeface="맑은 고딕"/>
+              </a:rPr>
+              <a:t>=FAR SYNC, </a:t>
+            </a:r>
+            <a:r>
+              <a:rPr sz="1600" b="0">
+                <a:solidFill>
+                  <a:srgbClr val="222222"/>
+                </a:solidFill>
+                <a:latin typeface="Consolas"/>
+                <a:cs typeface="Consolas"/>
+              </a:rPr>
+              <a:t>CONTROLFILE_TYPE</a:t>
+            </a:r>
+            <a:r>
+              <a:rPr sz="1600" b="0">
+                <a:solidFill>
+                  <a:srgbClr val="222222"/>
+                </a:solidFill>
+                <a:latin typeface="맑은 고딕"/>
+              </a:rPr>
+              <a:t>=FARSYNC.</a:t>
             </a:r>
           </a:p>
           <a:p>
@@ -13817,7 +16022,63 @@
                 </a:solidFill>
                 <a:latin typeface="맑은 고딕"/>
               </a:rPr>
-              <a:t>•  SRL **정의는 상속**된다. `ADD` 하면 ORA-01184. `CLEAR LOGFILE` 로 실체를 만든다(200MB × 4).</a:t>
+              <a:t>•  SRL </a:t>
+            </a:r>
+            <a:r>
+              <a:rPr sz="1600" b="1">
+                <a:solidFill>
+                  <a:srgbClr val="222222"/>
+                </a:solidFill>
+                <a:latin typeface="맑은 고딕"/>
+              </a:rPr>
+              <a:t>정의는 상속</a:t>
+            </a:r>
+            <a:r>
+              <a:rPr sz="1600" b="0">
+                <a:solidFill>
+                  <a:srgbClr val="222222"/>
+                </a:solidFill>
+                <a:latin typeface="맑은 고딕"/>
+              </a:rPr>
+              <a:t>된다. </a:t>
+            </a:r>
+            <a:r>
+              <a:rPr sz="1600" b="0">
+                <a:solidFill>
+                  <a:srgbClr val="222222"/>
+                </a:solidFill>
+                <a:latin typeface="Consolas"/>
+                <a:cs typeface="Consolas"/>
+              </a:rPr>
+              <a:t>ADD</a:t>
+            </a:r>
+            <a:r>
+              <a:rPr sz="1600" b="0">
+                <a:solidFill>
+                  <a:srgbClr val="222222"/>
+                </a:solidFill>
+                <a:latin typeface="맑은 고딕"/>
+              </a:rPr>
+              <a:t> 하면 ORA-01184. </a:t>
+            </a:r>
+            <a:r>
+              <a:rPr sz="1600" b="0">
+                <a:solidFill>
+                  <a:srgbClr val="222222"/>
+                </a:solidFill>
+                <a:latin typeface="Consolas"/>
+                <a:cs typeface="Consolas"/>
+              </a:rPr>
+              <a:t>CLEAR LOGFILE</a:t>
+            </a:r>
+            <a:r>
+              <a:rPr sz="1600" b="0">
+                <a:solidFill>
+                  <a:srgbClr val="222222"/>
+                </a:solidFill>
+                <a:latin typeface="맑은 고딕"/>
+              </a:rPr>
+              <a:t> 로 실체를 만든다(200MB × 4).</a:t>
             </a:r>
           </a:p>
           <a:p>
@@ -13833,7 +16094,25 @@
                 </a:solidFill>
                 <a:latin typeface="맑은 고딕"/>
               </a:rPr>
-              <a:t>•  Far Sync 도 **동적 등록이 된다**(status READY). 정적 등록은 재기동·원격 기동 때문에 함께 둔다.</a:t>
+              <a:t>•  Far Sync 도 </a:t>
+            </a:r>
+            <a:r>
+              <a:rPr sz="1600" b="1">
+                <a:solidFill>
+                  <a:srgbClr val="222222"/>
+                </a:solidFill>
+                <a:latin typeface="맑은 고딕"/>
+              </a:rPr>
+              <a:t>동적 등록이 된다</a:t>
+            </a:r>
+            <a:r>
+              <a:rPr sz="1600" b="0">
+                <a:solidFill>
+                  <a:srgbClr val="222222"/>
+                </a:solidFill>
+                <a:latin typeface="맑은 고딕"/>
+              </a:rPr>
+              <a:t>(status READY). 정적 등록은 재기동·원격 기동 때문에 함께 둔다.</a:t>
             </a:r>
           </a:p>
           <a:p>
@@ -13849,7 +16128,45 @@
                 </a:solidFill>
                 <a:latin typeface="맑은 고딕"/>
               </a:rPr>
-              <a:t>•  전달 목적지의 `VALID_FOR` 는 `(STANDBY_LOGFILES, STANDBY_ROLE)`. 리두 출처가 SRL 이기 때문이다.</a:t>
+              <a:t>•  전달 목적지의 </a:t>
+            </a:r>
+            <a:r>
+              <a:rPr sz="1600" b="0">
+                <a:solidFill>
+                  <a:srgbClr val="222222"/>
+                </a:solidFill>
+                <a:latin typeface="Consolas"/>
+                <a:cs typeface="Consolas"/>
+              </a:rPr>
+              <a:t>VALID_FOR</a:t>
+            </a:r>
+            <a:r>
+              <a:rPr sz="1600" b="0">
+                <a:solidFill>
+                  <a:srgbClr val="222222"/>
+                </a:solidFill>
+                <a:latin typeface="맑은 고딕"/>
+              </a:rPr>
+              <a:t> 는 </a:t>
+            </a:r>
+            <a:r>
+              <a:rPr sz="1600" b="0">
+                <a:solidFill>
+                  <a:srgbClr val="222222"/>
+                </a:solidFill>
+                <a:latin typeface="Consolas"/>
+                <a:cs typeface="Consolas"/>
+              </a:rPr>
+              <a:t>(STANDBY_LOGFILES, STANDBY_ROLE)</a:t>
+            </a:r>
+            <a:r>
+              <a:rPr sz="1600" b="0">
+                <a:solidFill>
+                  <a:srgbClr val="222222"/>
+                </a:solidFill>
+                <a:latin typeface="맑은 고딕"/>
+              </a:rPr>
+              <a:t>. 리두 출처가 SRL 이기 때문이다.</a:t>
             </a:r>
           </a:p>
         </p:txBody>
@@ -13989,7 +16306,44 @@
                 </a:solidFill>
                 <a:latin typeface="맑은 고딕"/>
               </a:rPr>
-              <a:t>•  `LOG_ARCHIVE_CONFIG` 에 세 이름을 모두 넣는다. 빠지면 **ORA-16057** — 원인은 받는 쪽에 있다.</a:t>
+              <a:t>•  </a:t>
+            </a:r>
+            <a:r>
+              <a:rPr sz="1600" b="0">
+                <a:solidFill>
+                  <a:srgbClr val="222222"/>
+                </a:solidFill>
+                <a:latin typeface="Consolas"/>
+                <a:cs typeface="Consolas"/>
+              </a:rPr>
+              <a:t>LOG_ARCHIVE_CONFIG</a:t>
+            </a:r>
+            <a:r>
+              <a:rPr sz="1600" b="0">
+                <a:solidFill>
+                  <a:srgbClr val="222222"/>
+                </a:solidFill>
+                <a:latin typeface="맑은 고딕"/>
+              </a:rPr>
+              <a:t> 에 세 이름을 모두 넣는다. 빠지면 </a:t>
+            </a:r>
+            <a:r>
+              <a:rPr sz="1600" b="1">
+                <a:solidFill>
+                  <a:srgbClr val="222222"/>
+                </a:solidFill>
+                <a:latin typeface="맑은 고딕"/>
+              </a:rPr>
+              <a:t>ORA-16057</a:t>
+            </a:r>
+            <a:r>
+              <a:rPr sz="1600" b="0">
+                <a:solidFill>
+                  <a:srgbClr val="222222"/>
+                </a:solidFill>
+                <a:latin typeface="맑은 고딕"/>
+              </a:rPr>
+              <a:t> — 원인은 받는 쪽에 있다.</a:t>
             </a:r>
           </a:p>
           <a:p>
@@ -14005,7 +16359,25 @@
                 </a:solidFill>
                 <a:latin typeface="맑은 고딕"/>
               </a:rPr>
-              <a:t>•  구성 변경은 **받는 쪽 먼저, 보내는 쪽 나중**. 오류가 남으면 DEFER → ENABLE.</a:t>
+              <a:t>•  구성 변경은 </a:t>
+            </a:r>
+            <a:r>
+              <a:rPr sz="1600" b="1">
+                <a:solidFill>
+                  <a:srgbClr val="222222"/>
+                </a:solidFill>
+                <a:latin typeface="맑은 고딕"/>
+              </a:rPr>
+              <a:t>받는 쪽 먼저, 보내는 쪽 나중</a:t>
+            </a:r>
+            <a:r>
+              <a:rPr sz="1600" b="0">
+                <a:solidFill>
+                  <a:srgbClr val="222222"/>
+                </a:solidFill>
+                <a:latin typeface="맑은 고딕"/>
+              </a:rPr>
+              <a:t>. 오류가 남으면 DEFER → ENABLE.</a:t>
             </a:r>
           </a:p>
           <a:p>
@@ -14021,7 +16393,63 @@
                 </a:solidFill>
                 <a:latin typeface="맑은 고딕"/>
               </a:rPr>
-              <a:t>•  `TRANSMIT_MODE`·`AFFIRM` 은 **V$ARCHIVE_DEST**. 상태 뷰에서 찾으면 ORA-00904.</a:t>
+              <a:t>•  </a:t>
+            </a:r>
+            <a:r>
+              <a:rPr sz="1600" b="0">
+                <a:solidFill>
+                  <a:srgbClr val="222222"/>
+                </a:solidFill>
+                <a:latin typeface="Consolas"/>
+                <a:cs typeface="Consolas"/>
+              </a:rPr>
+              <a:t>TRANSMIT_MODE</a:t>
+            </a:r>
+            <a:r>
+              <a:rPr sz="1600" b="0">
+                <a:solidFill>
+                  <a:srgbClr val="222222"/>
+                </a:solidFill>
+                <a:latin typeface="맑은 고딕"/>
+              </a:rPr>
+              <a:t>·</a:t>
+            </a:r>
+            <a:r>
+              <a:rPr sz="1600" b="0">
+                <a:solidFill>
+                  <a:srgbClr val="222222"/>
+                </a:solidFill>
+                <a:latin typeface="Consolas"/>
+                <a:cs typeface="Consolas"/>
+              </a:rPr>
+              <a:t>AFFIRM</a:t>
+            </a:r>
+            <a:r>
+              <a:rPr sz="1600" b="0">
+                <a:solidFill>
+                  <a:srgbClr val="222222"/>
+                </a:solidFill>
+                <a:latin typeface="맑은 고딕"/>
+              </a:rPr>
+              <a:t> 은 </a:t>
+            </a:r>
+            <a:r>
+              <a:rPr sz="1600" b="1">
+                <a:solidFill>
+                  <a:srgbClr val="222222"/>
+                </a:solidFill>
+                <a:latin typeface="맑은 고딕"/>
+              </a:rPr>
+              <a:t>V$ARCHIVE_DEST</a:t>
+            </a:r>
+            <a:r>
+              <a:rPr sz="1600" b="0">
+                <a:solidFill>
+                  <a:srgbClr val="222222"/>
+                </a:solidFill>
+                <a:latin typeface="맑은 고딕"/>
+              </a:rPr>
+              <a:t>. 상태 뷰에서 찾으면 ORA-00904.</a:t>
             </a:r>
           </a:p>
           <a:p>
@@ -14037,7 +16465,44 @@
                 </a:solidFill>
                 <a:latin typeface="맑은 고딕"/>
               </a:rPr>
-              <a:t>•  세 노드의 `PROTECTION_LEVEL` 이 다르다. **boston 만 RESYNCHRONIZATION** — ASYNC 로 받기 때문.</a:t>
+              <a:t>•  세 노드의 </a:t>
+            </a:r>
+            <a:r>
+              <a:rPr sz="1600" b="0">
+                <a:solidFill>
+                  <a:srgbClr val="222222"/>
+                </a:solidFill>
+                <a:latin typeface="Consolas"/>
+                <a:cs typeface="Consolas"/>
+              </a:rPr>
+              <a:t>PROTECTION_LEVEL</a:t>
+            </a:r>
+            <a:r>
+              <a:rPr sz="1600" b="0">
+                <a:solidFill>
+                  <a:srgbClr val="222222"/>
+                </a:solidFill>
+                <a:latin typeface="맑은 고딕"/>
+              </a:rPr>
+              <a:t> 이 다르다. </a:t>
+            </a:r>
+            <a:r>
+              <a:rPr sz="1600" b="1">
+                <a:solidFill>
+                  <a:srgbClr val="222222"/>
+                </a:solidFill>
+                <a:latin typeface="맑은 고딕"/>
+              </a:rPr>
+              <a:t>boston 만 RESYNCHRONIZATION</a:t>
+            </a:r>
+            <a:r>
+              <a:rPr sz="1600" b="0">
+                <a:solidFill>
+                  <a:srgbClr val="222222"/>
+                </a:solidFill>
+                <a:latin typeface="맑은 고딕"/>
+              </a:rPr>
+              <a:t> — ASYNC 로 받기 때문.</a:t>
             </a:r>
           </a:p>
           <a:p>
@@ -14053,7 +16518,62 @@
                 </a:solidFill>
                 <a:latin typeface="맑은 고딕"/>
               </a:rPr>
-              <a:t>•  Far Sync 는 데이터 파일 0, `V$LOG` 0행. 열지 못하고(**ORA-16476**) 적용하지 못한다(**ORA-01665**).</a:t>
+              <a:t>•  Far Sync 는 데이터 파일 0, </a:t>
+            </a:r>
+            <a:r>
+              <a:rPr sz="1600" b="0">
+                <a:solidFill>
+                  <a:srgbClr val="222222"/>
+                </a:solidFill>
+                <a:latin typeface="Consolas"/>
+                <a:cs typeface="Consolas"/>
+              </a:rPr>
+              <a:t>V$LOG</a:t>
+            </a:r>
+            <a:r>
+              <a:rPr sz="1600" b="0">
+                <a:solidFill>
+                  <a:srgbClr val="222222"/>
+                </a:solidFill>
+                <a:latin typeface="맑은 고딕"/>
+              </a:rPr>
+              <a:t> 0행. 열지 못하고(</a:t>
+            </a:r>
+            <a:r>
+              <a:rPr sz="1600" b="1">
+                <a:solidFill>
+                  <a:srgbClr val="222222"/>
+                </a:solidFill>
+                <a:latin typeface="맑은 고딕"/>
+              </a:rPr>
+              <a:t>ORA-16476</a:t>
+            </a:r>
+            <a:r>
+              <a:rPr sz="1600" b="0">
+                <a:solidFill>
+                  <a:srgbClr val="222222"/>
+                </a:solidFill>
+                <a:latin typeface="맑은 고딕"/>
+              </a:rPr>
+              <a:t>) 적용하지 못한다(</a:t>
+            </a:r>
+            <a:r>
+              <a:rPr sz="1600" b="1">
+                <a:solidFill>
+                  <a:srgbClr val="222222"/>
+                </a:solidFill>
+                <a:latin typeface="맑은 고딕"/>
+              </a:rPr>
+              <a:t>ORA-01665</a:t>
+            </a:r>
+            <a:r>
+              <a:rPr sz="1600" b="0">
+                <a:solidFill>
+                  <a:srgbClr val="222222"/>
+                </a:solidFill>
+                <a:latin typeface="맑은 고딕"/>
+              </a:rPr>
+              <a:t>).</a:t>
             </a:r>
           </a:p>
           <a:p>
@@ -14069,7 +16589,44 @@
                 </a:solidFill>
                 <a:latin typeface="맑은 고딕"/>
               </a:rPr>
-              <a:t>•  계단식 목적지에 SYNC 를 줘도 거부되지 않는다. **ASYNC 를 명시**한다. `VALID_FOR` 오설정은 STATUS 가 VALID 인 채로 조용히 실패한다.</a:t>
+              <a:t>•  계단식 목적지에 SYNC 를 줘도 거부되지 않는다. </a:t>
+            </a:r>
+            <a:r>
+              <a:rPr sz="1600" b="1">
+                <a:solidFill>
+                  <a:srgbClr val="222222"/>
+                </a:solidFill>
+                <a:latin typeface="맑은 고딕"/>
+              </a:rPr>
+              <a:t>ASYNC 를 명시</a:t>
+            </a:r>
+            <a:r>
+              <a:rPr sz="1600" b="0">
+                <a:solidFill>
+                  <a:srgbClr val="222222"/>
+                </a:solidFill>
+                <a:latin typeface="맑은 고딕"/>
+              </a:rPr>
+              <a:t>한다. </a:t>
+            </a:r>
+            <a:r>
+              <a:rPr sz="1600" b="0">
+                <a:solidFill>
+                  <a:srgbClr val="222222"/>
+                </a:solidFill>
+                <a:latin typeface="Consolas"/>
+                <a:cs typeface="Consolas"/>
+              </a:rPr>
+              <a:t>VALID_FOR</a:t>
+            </a:r>
+            <a:r>
+              <a:rPr sz="1600" b="0">
+                <a:solidFill>
+                  <a:srgbClr val="222222"/>
+                </a:solidFill>
+                <a:latin typeface="맑은 고딕"/>
+              </a:rPr>
+              <a:t> 오설정은 STATUS 가 VALID 인 채로 조용히 실패한다.</a:t>
             </a:r>
           </a:p>
         </p:txBody>
@@ -14500,7 +17057,16 @@
                 </a:solidFill>
                 <a:latin typeface="맑은 고딕"/>
               </a:rPr>
-              <a:t>•  네트워크로 Standby 에 보낸다 — **거리에 비례**</a:t>
+              <a:t>•  네트워크로 Standby 에 보낸다 — </a:t>
+            </a:r>
+            <a:r>
+              <a:rPr sz="1700" b="1">
+                <a:solidFill>
+                  <a:srgbClr val="222222"/>
+                </a:solidFill>
+                <a:latin typeface="맑은 고딕"/>
+              </a:rPr>
+              <a:t>거리에 비례</a:t>
             </a:r>
           </a:p>
           <a:p>
@@ -14532,7 +17098,16 @@
                 </a:solidFill>
                 <a:latin typeface="맑은 고딕"/>
               </a:rPr>
-              <a:t>•  Standby 가 확인을 보낸다 — **거리에 비례**</a:t>
+              <a:t>•  Standby 가 확인을 보낸다 — </a:t>
+            </a:r>
+            <a:r>
+              <a:rPr sz="1700" b="1">
+                <a:solidFill>
+                  <a:srgbClr val="222222"/>
+                </a:solidFill>
+                <a:latin typeface="맑은 고딕"/>
+              </a:rPr>
+              <a:t>거리에 비례</a:t>
             </a:r>
           </a:p>
           <a:p>
@@ -14727,7 +17302,25 @@
                 </a:solidFill>
                 <a:latin typeface="맑은 고딕"/>
               </a:rPr>
-              <a:t>•  재해 복구 관점 — **멀수록 좋다**. 같은 건물이면 화재 하나로 둘 다 잃는다</a:t>
+              <a:t>•  재해 복구 관점 — </a:t>
+            </a:r>
+            <a:r>
+              <a:rPr sz="1700" b="1">
+                <a:solidFill>
+                  <a:srgbClr val="222222"/>
+                </a:solidFill>
+                <a:latin typeface="맑은 고딕"/>
+              </a:rPr>
+              <a:t>멀수록 좋다</a:t>
+            </a:r>
+            <a:r>
+              <a:rPr sz="1700" b="0">
+                <a:solidFill>
+                  <a:srgbClr val="222222"/>
+                </a:solidFill>
+                <a:latin typeface="맑은 고딕"/>
+              </a:rPr>
+              <a:t>. 같은 건물이면 화재 하나로 둘 다 잃는다</a:t>
             </a:r>
           </a:p>
           <a:p>
@@ -14743,7 +17336,16 @@
                 </a:solidFill>
                 <a:latin typeface="맑은 고딕"/>
               </a:rPr>
-              <a:t>•  무손실 관점 — **동기 전송이 필요하다**</a:t>
+              <a:t>•  무손실 관점 — </a:t>
+            </a:r>
+            <a:r>
+              <a:rPr sz="1700" b="1">
+                <a:solidFill>
+                  <a:srgbClr val="222222"/>
+                </a:solidFill>
+                <a:latin typeface="맑은 고딕"/>
+              </a:rPr>
+              <a:t>동기 전송이 필요하다</a:t>
             </a:r>
           </a:p>
           <a:p>
@@ -14759,7 +17361,16 @@
                 </a:solidFill>
                 <a:latin typeface="맑은 고딕"/>
               </a:rPr>
-              <a:t>•  동기 전송 관점 — **가까워야 한다**</a:t>
+              <a:t>•  동기 전송 관점 — </a:t>
+            </a:r>
+            <a:r>
+              <a:rPr sz="1700" b="1">
+                <a:solidFill>
+                  <a:srgbClr val="222222"/>
+                </a:solidFill>
+                <a:latin typeface="맑은 고딕"/>
+              </a:rPr>
+              <a:t>가까워야 한다</a:t>
             </a:r>
           </a:p>
           <a:p>
@@ -14954,7 +17565,25 @@
                 </a:solidFill>
                 <a:latin typeface="맑은 고딕"/>
               </a:rPr>
-              <a:t>•  **chicago (Primary)** — 주 센터, 데이터 있음</a:t>
+              <a:t>•  </a:t>
+            </a:r>
+            <a:r>
+              <a:rPr sz="1700" b="1">
+                <a:solidFill>
+                  <a:srgbClr val="222222"/>
+                </a:solidFill>
+                <a:latin typeface="맑은 고딕"/>
+              </a:rPr>
+              <a:t>chicago (Primary)</a:t>
+            </a:r>
+            <a:r>
+              <a:rPr sz="1700" b="0">
+                <a:solidFill>
+                  <a:srgbClr val="222222"/>
+                </a:solidFill>
+                <a:latin typeface="맑은 고딕"/>
+              </a:rPr>
+              <a:t> — 주 센터, 데이터 있음</a:t>
             </a:r>
           </a:p>
           <a:p>
@@ -14970,7 +17599,52 @@
                 </a:solidFill>
                 <a:latin typeface="맑은 고딕"/>
               </a:rPr>
-              <a:t>•  **farsync (Far Sync)** — 주 센터 근처, **SYNC AFFIRM**, 데이터 **없음**</a:t>
+              <a:t>•  </a:t>
+            </a:r>
+            <a:r>
+              <a:rPr sz="1700" b="1">
+                <a:solidFill>
+                  <a:srgbClr val="222222"/>
+                </a:solidFill>
+                <a:latin typeface="맑은 고딕"/>
+              </a:rPr>
+              <a:t>farsync (Far Sync)</a:t>
+            </a:r>
+            <a:r>
+              <a:rPr sz="1700" b="0">
+                <a:solidFill>
+                  <a:srgbClr val="222222"/>
+                </a:solidFill>
+                <a:latin typeface="맑은 고딕"/>
+              </a:rPr>
+              <a:t> — 주 센터 근처, </a:t>
+            </a:r>
+            <a:r>
+              <a:rPr sz="1700" b="1">
+                <a:solidFill>
+                  <a:srgbClr val="222222"/>
+                </a:solidFill>
+                <a:latin typeface="맑은 고딕"/>
+              </a:rPr>
+              <a:t>SYNC AFFIRM</a:t>
+            </a:r>
+            <a:r>
+              <a:rPr sz="1700" b="0">
+                <a:solidFill>
+                  <a:srgbClr val="222222"/>
+                </a:solidFill>
+                <a:latin typeface="맑은 고딕"/>
+              </a:rPr>
+              <a:t>, 데이터 </a:t>
+            </a:r>
+            <a:r>
+              <a:rPr sz="1700" b="1">
+                <a:solidFill>
+                  <a:srgbClr val="222222"/>
+                </a:solidFill>
+                <a:latin typeface="맑은 고딕"/>
+              </a:rPr>
+              <a:t>없음</a:t>
             </a:r>
           </a:p>
           <a:p>
@@ -14986,7 +17660,43 @@
                 </a:solidFill>
                 <a:latin typeface="맑은 고딕"/>
               </a:rPr>
-              <a:t>•  **boston (Standby)** — 원거리 DR 센터, Far Sync 가 **ASYNC** 로 전달</a:t>
+              <a:t>•  </a:t>
+            </a:r>
+            <a:r>
+              <a:rPr sz="1700" b="1">
+                <a:solidFill>
+                  <a:srgbClr val="222222"/>
+                </a:solidFill>
+                <a:latin typeface="맑은 고딕"/>
+              </a:rPr>
+              <a:t>boston (Standby)</a:t>
+            </a:r>
+            <a:r>
+              <a:rPr sz="1700" b="0">
+                <a:solidFill>
+                  <a:srgbClr val="222222"/>
+                </a:solidFill>
+                <a:latin typeface="맑은 고딕"/>
+              </a:rPr>
+              <a:t> — 원거리 DR 센터, Far Sync 가 </a:t>
+            </a:r>
+            <a:r>
+              <a:rPr sz="1700" b="1">
+                <a:solidFill>
+                  <a:srgbClr val="222222"/>
+                </a:solidFill>
+                <a:latin typeface="맑은 고딕"/>
+              </a:rPr>
+              <a:t>ASYNC</a:t>
+            </a:r>
+            <a:r>
+              <a:rPr sz="1700" b="0">
+                <a:solidFill>
+                  <a:srgbClr val="222222"/>
+                </a:solidFill>
+                <a:latin typeface="맑은 고딕"/>
+              </a:rPr>
+              <a:t> 로 전달</a:t>
             </a:r>
           </a:p>
           <a:p>
@@ -15213,7 +17923,43 @@
                 </a:solidFill>
                 <a:latin typeface="맑은 고딕"/>
               </a:rPr>
-              <a:t>•  메모리 **2048MB**, CPU **2** (chicago·boston 은 6144MB / 4)</a:t>
+              <a:t>•  메모리 </a:t>
+            </a:r>
+            <a:r>
+              <a:rPr sz="1700" b="1">
+                <a:solidFill>
+                  <a:srgbClr val="222222"/>
+                </a:solidFill>
+                <a:latin typeface="맑은 고딕"/>
+              </a:rPr>
+              <a:t>2048MB</a:t>
+            </a:r>
+            <a:r>
+              <a:rPr sz="1700" b="0">
+                <a:solidFill>
+                  <a:srgbClr val="222222"/>
+                </a:solidFill>
+                <a:latin typeface="맑은 고딕"/>
+              </a:rPr>
+              <a:t>, CPU </a:t>
+            </a:r>
+            <a:r>
+              <a:rPr sz="1700" b="1">
+                <a:solidFill>
+                  <a:srgbClr val="222222"/>
+                </a:solidFill>
+                <a:latin typeface="맑은 고딕"/>
+              </a:rPr>
+              <a:t>2</a:t>
+            </a:r>
+            <a:r>
+              <a:rPr sz="1700" b="0">
+                <a:solidFill>
+                  <a:srgbClr val="222222"/>
+                </a:solidFill>
+                <a:latin typeface="맑은 고딕"/>
+              </a:rPr>
+              <a:t> (chicago·boston 은 6144MB / 4)</a:t>
             </a:r>
           </a:p>
           <a:p>
@@ -15245,7 +17991,25 @@
                 </a:solidFill>
                 <a:latin typeface="맑은 고딕"/>
               </a:rPr>
-              <a:t>•  오라클 바이너리는 Primary 와 같은 **19.3.0** 이어야 한다</a:t>
+              <a:t>•  오라클 바이너리는 Primary 와 같은 </a:t>
+            </a:r>
+            <a:r>
+              <a:rPr sz="1700" b="1">
+                <a:solidFill>
+                  <a:srgbClr val="222222"/>
+                </a:solidFill>
+                <a:latin typeface="맑은 고딕"/>
+              </a:rPr>
+              <a:t>19.3.0</a:t>
+            </a:r>
+            <a:r>
+              <a:rPr sz="1700" b="0">
+                <a:solidFill>
+                  <a:srgbClr val="222222"/>
+                </a:solidFill>
+                <a:latin typeface="맑은 고딕"/>
+              </a:rPr>
+              <a:t> 이어야 한다</a:t>
             </a:r>
           </a:p>
         </p:txBody>
